--- a/backend/templates/quarterly-review.pptx
+++ b/backend/templates/quarterly-review.pptx
@@ -11,8 +11,8 @@
   <p:notesMasterIdLst>
     <p:notesMasterId r:id="rId4"/>
   </p:notesMasterIdLst>
-  <p:sldSz cx="9144000" cy="5143500"/>
-  <p:notesSz cx="5143500" cy="9144000"/>
+  <p:sldSz cx="12192000" cy="6858000"/>
+  <p:notesSz cx="6858000" cy="12192000"/>
   <p:defaultTextStyle>
     <a:lvl1pPr marL="0" algn="l" defTabSz="914400" rtl="0" eaLnBrk="1" latinLnBrk="0" hangingPunct="1">
       <a:defRPr sz="1800" kern="1200">
@@ -1201,8 +1201,8 @@
         </p:nvSpPr>
         <p:spPr>
           <a:xfrm>
-            <a:off x="548640" y="182880"/>
-            <a:ext cx="10972800" cy="640080"/>
+            <a:off x="548640" y="0"/>
+            <a:ext cx="11064240" cy="1005840"/>
           </a:xfrm>
           <a:prstGeom prst="rect">
             <a:avLst/>
@@ -1211,7 +1211,9 @@
           <a:ln/>
         </p:spPr>
         <p:txBody>
-          <a:bodyPr wrap="square" rtlCol="0" anchor="ctr"/>
+          <a:bodyPr wrap="square" rtlCol="0" anchor="ctr">
+            <a:normAutofit/>
+          </a:bodyPr>
           <a:lstStyle/>
           <a:p>
             <a:pPr algn="l" indent="0" marL="0">
@@ -1277,7 +1279,9 @@
           <a:ln/>
         </p:spPr>
         <p:txBody>
-          <a:bodyPr wrap="square" rtlCol="0" anchor="ctr"/>
+          <a:bodyPr wrap="square" rtlCol="0" anchor="ctr">
+            <a:normAutofit/>
+          </a:bodyPr>
           <a:lstStyle/>
           <a:p>
             <a:pPr algn="ctr" indent="0" marL="0">
@@ -1316,14 +1320,16 @@
           <a:ln/>
         </p:spPr>
         <p:txBody>
-          <a:bodyPr wrap="square" rtlCol="0" anchor="ctr"/>
+          <a:bodyPr wrap="square" rtlCol="0" anchor="ctr">
+            <a:normAutofit/>
+          </a:bodyPr>
           <a:lstStyle/>
           <a:p>
             <a:pPr algn="ctr" indent="0" marL="0">
               <a:buNone/>
             </a:pPr>
             <a:r>
-              <a:rPr lang="en-US" sz="3000" b="1" dirty="0">
+              <a:rPr lang="en-US" sz="2800" b="1" dirty="0">
                 <a:solidFill>
                   <a:srgbClr val="1F3864"/>
                 </a:solidFill>
@@ -1333,7 +1339,7 @@
               </a:rPr>
               <a:t>—</a:t>
             </a:r>
-            <a:endParaRPr lang="en-US" sz="3000" dirty="0"/>
+            <a:endParaRPr lang="en-US" sz="2800" dirty="0"/>
           </a:p>
         </p:txBody>
       </p:sp>
@@ -1382,7 +1388,9 @@
           <a:ln/>
         </p:spPr>
         <p:txBody>
-          <a:bodyPr wrap="square" rtlCol="0" anchor="ctr"/>
+          <a:bodyPr wrap="square" rtlCol="0" anchor="ctr">
+            <a:normAutofit/>
+          </a:bodyPr>
           <a:lstStyle/>
           <a:p>
             <a:pPr algn="ctr" indent="0" marL="0">
@@ -1421,14 +1429,16 @@
           <a:ln/>
         </p:spPr>
         <p:txBody>
-          <a:bodyPr wrap="square" rtlCol="0" anchor="ctr"/>
+          <a:bodyPr wrap="square" rtlCol="0" anchor="ctr">
+            <a:normAutofit/>
+          </a:bodyPr>
           <a:lstStyle/>
           <a:p>
             <a:pPr algn="ctr" indent="0" marL="0">
               <a:buNone/>
             </a:pPr>
             <a:r>
-              <a:rPr lang="en-US" sz="3000" b="1" dirty="0">
+              <a:rPr lang="en-US" sz="2800" b="1" dirty="0">
                 <a:solidFill>
                   <a:srgbClr val="1F3864"/>
                 </a:solidFill>
@@ -1438,7 +1448,7 @@
               </a:rPr>
               <a:t>—</a:t>
             </a:r>
-            <a:endParaRPr lang="en-US" sz="3000" dirty="0"/>
+            <a:endParaRPr lang="en-US" sz="2800" dirty="0"/>
           </a:p>
         </p:txBody>
       </p:sp>
@@ -1487,7 +1497,9 @@
           <a:ln/>
         </p:spPr>
         <p:txBody>
-          <a:bodyPr wrap="square" rtlCol="0" anchor="ctr"/>
+          <a:bodyPr wrap="square" rtlCol="0" anchor="ctr">
+            <a:normAutofit/>
+          </a:bodyPr>
           <a:lstStyle/>
           <a:p>
             <a:pPr algn="ctr" indent="0" marL="0">
@@ -1526,14 +1538,16 @@
           <a:ln/>
         </p:spPr>
         <p:txBody>
-          <a:bodyPr wrap="square" rtlCol="0" anchor="ctr"/>
+          <a:bodyPr wrap="square" rtlCol="0" anchor="ctr">
+            <a:normAutofit/>
+          </a:bodyPr>
           <a:lstStyle/>
           <a:p>
             <a:pPr algn="ctr" indent="0" marL="0">
               <a:buNone/>
             </a:pPr>
             <a:r>
-              <a:rPr lang="en-US" sz="3000" b="1" dirty="0">
+              <a:rPr lang="en-US" sz="2800" b="1" dirty="0">
                 <a:solidFill>
                   <a:srgbClr val="1F3864"/>
                 </a:solidFill>
@@ -1543,7 +1557,7 @@
               </a:rPr>
               <a:t>—</a:t>
             </a:r>
-            <a:endParaRPr lang="en-US" sz="3000" dirty="0"/>
+            <a:endParaRPr lang="en-US" sz="2800" dirty="0"/>
           </a:p>
         </p:txBody>
       </p:sp>
@@ -1592,7 +1606,9 @@
           <a:ln/>
         </p:spPr>
         <p:txBody>
-          <a:bodyPr wrap="square" rtlCol="0" anchor="ctr"/>
+          <a:bodyPr wrap="square" rtlCol="0" anchor="ctr">
+            <a:normAutofit/>
+          </a:bodyPr>
           <a:lstStyle/>
           <a:p>
             <a:pPr algn="ctr" indent="0" marL="0">
@@ -1631,14 +1647,16 @@
           <a:ln/>
         </p:spPr>
         <p:txBody>
-          <a:bodyPr wrap="square" rtlCol="0" anchor="ctr"/>
+          <a:bodyPr wrap="square" rtlCol="0" anchor="ctr">
+            <a:normAutofit/>
+          </a:bodyPr>
           <a:lstStyle/>
           <a:p>
             <a:pPr algn="ctr" indent="0" marL="0">
               <a:buNone/>
             </a:pPr>
             <a:r>
-              <a:rPr lang="en-US" sz="3000" b="1" dirty="0">
+              <a:rPr lang="en-US" sz="2800" b="1" dirty="0">
                 <a:solidFill>
                   <a:srgbClr val="1F3864"/>
                 </a:solidFill>
@@ -1648,7 +1666,7 @@
               </a:rPr>
               <a:t>—</a:t>
             </a:r>
-            <a:endParaRPr lang="en-US" sz="3000" dirty="0"/>
+            <a:endParaRPr lang="en-US" sz="2800" dirty="0"/>
           </a:p>
         </p:txBody>
       </p:sp>

--- a/backend/templates/quarterly-review.pptx
+++ b/backend/templates/quarterly-review.pptx
@@ -5,16 +5,16 @@
     <p:sldMasterId id="2147483648" r:id="rId1"/>
   </p:sldMasterIdLst>
   <p:sldIdLst>
-    <p:sldId id="256" r:id="rId2"/>
-    <p:sldId id="257" r:id="rId3"/>
+    <p:sldId id="256" r:id="rId7"/>
+    <p:sldId id="257" r:id="rId8"/>
   </p:sldIdLst>
-  <p:notesMasterIdLst>
-    <p:notesMasterId r:id="rId4"/>
-  </p:notesMasterIdLst>
-  <p:sldSz cx="12192000" cy="6858000"/>
-  <p:notesSz cx="6858000" cy="12192000"/>
+  <p:sldSz cx="12192000" cy="6858000" type="screen4x3"/>
+  <p:notesSz cx="6858000" cy="9144000"/>
   <p:defaultTextStyle>
-    <a:lvl1pPr marL="0" algn="l" defTabSz="914400" rtl="0" eaLnBrk="1" latinLnBrk="0" hangingPunct="1">
+    <a:defPPr>
+      <a:defRPr lang="en-US"/>
+    </a:defPPr>
+    <a:lvl1pPr marL="0" algn="l" defTabSz="457200" rtl="0" eaLnBrk="1" latinLnBrk="0" hangingPunct="1">
       <a:defRPr sz="1800" kern="1200">
         <a:solidFill>
           <a:schemeClr val="tx1"/>
@@ -24,7 +24,7 @@
         <a:cs typeface="+mn-cs"/>
       </a:defRPr>
     </a:lvl1pPr>
-    <a:lvl2pPr marL="457200" algn="l" defTabSz="914400" rtl="0" eaLnBrk="1" latinLnBrk="0" hangingPunct="1">
+    <a:lvl2pPr marL="457200" algn="l" defTabSz="457200" rtl="0" eaLnBrk="1" latinLnBrk="0" hangingPunct="1">
       <a:defRPr sz="1800" kern="1200">
         <a:solidFill>
           <a:schemeClr val="tx1"/>
@@ -34,7 +34,7 @@
         <a:cs typeface="+mn-cs"/>
       </a:defRPr>
     </a:lvl2pPr>
-    <a:lvl3pPr marL="914400" algn="l" defTabSz="914400" rtl="0" eaLnBrk="1" latinLnBrk="0" hangingPunct="1">
+    <a:lvl3pPr marL="914400" algn="l" defTabSz="457200" rtl="0" eaLnBrk="1" latinLnBrk="0" hangingPunct="1">
       <a:defRPr sz="1800" kern="1200">
         <a:solidFill>
           <a:schemeClr val="tx1"/>
@@ -44,7 +44,7 @@
         <a:cs typeface="+mn-cs"/>
       </a:defRPr>
     </a:lvl3pPr>
-    <a:lvl4pPr marL="1371600" algn="l" defTabSz="914400" rtl="0" eaLnBrk="1" latinLnBrk="0" hangingPunct="1">
+    <a:lvl4pPr marL="1371600" algn="l" defTabSz="457200" rtl="0" eaLnBrk="1" latinLnBrk="0" hangingPunct="1">
       <a:defRPr sz="1800" kern="1200">
         <a:solidFill>
           <a:schemeClr val="tx1"/>
@@ -54,7 +54,7 @@
         <a:cs typeface="+mn-cs"/>
       </a:defRPr>
     </a:lvl4pPr>
-    <a:lvl5pPr marL="1828800" algn="l" defTabSz="914400" rtl="0" eaLnBrk="1" latinLnBrk="0" hangingPunct="1">
+    <a:lvl5pPr marL="1828800" algn="l" defTabSz="457200" rtl="0" eaLnBrk="1" latinLnBrk="0" hangingPunct="1">
       <a:defRPr sz="1800" kern="1200">
         <a:solidFill>
           <a:schemeClr val="tx1"/>
@@ -64,7 +64,7 @@
         <a:cs typeface="+mn-cs"/>
       </a:defRPr>
     </a:lvl5pPr>
-    <a:lvl6pPr marL="2286000" algn="l" defTabSz="914400" rtl="0" eaLnBrk="1" latinLnBrk="0" hangingPunct="1">
+    <a:lvl6pPr marL="2286000" algn="l" defTabSz="457200" rtl="0" eaLnBrk="1" latinLnBrk="0" hangingPunct="1">
       <a:defRPr sz="1800" kern="1200">
         <a:solidFill>
           <a:schemeClr val="tx1"/>
@@ -74,7 +74,7 @@
         <a:cs typeface="+mn-cs"/>
       </a:defRPr>
     </a:lvl6pPr>
-    <a:lvl7pPr marL="2743200" algn="l" defTabSz="914400" rtl="0" eaLnBrk="1" latinLnBrk="0" hangingPunct="1">
+    <a:lvl7pPr marL="2743200" algn="l" defTabSz="457200" rtl="0" eaLnBrk="1" latinLnBrk="0" hangingPunct="1">
       <a:defRPr sz="1800" kern="1200">
         <a:solidFill>
           <a:schemeClr val="tx1"/>
@@ -84,7 +84,7 @@
         <a:cs typeface="+mn-cs"/>
       </a:defRPr>
     </a:lvl7pPr>
-    <a:lvl8pPr marL="3200400" algn="l" defTabSz="914400" rtl="0" eaLnBrk="1" latinLnBrk="0" hangingPunct="1">
+    <a:lvl8pPr marL="3200400" algn="l" defTabSz="457200" rtl="0" eaLnBrk="1" latinLnBrk="0" hangingPunct="1">
       <a:defRPr sz="1800" kern="1200">
         <a:solidFill>
           <a:schemeClr val="tx1"/>
@@ -94,7 +94,7 @@
         <a:cs typeface="+mn-cs"/>
       </a:defRPr>
     </a:lvl8pPr>
-    <a:lvl9pPr marL="3657600" algn="l" defTabSz="914400" rtl="0" eaLnBrk="1" latinLnBrk="0" hangingPunct="1">
+    <a:lvl9pPr marL="3657600" algn="l" defTabSz="457200" rtl="0" eaLnBrk="1" latinLnBrk="0" hangingPunct="1">
       <a:defRPr sz="1800" kern="1200">
         <a:solidFill>
           <a:schemeClr val="tx1"/>
@@ -108,8 +108,2469 @@
 </p:presentation>
 </file>
 
-<file path=ppt/notesMasters/notesMaster1.xml><?xml version="1.0" encoding="utf-8"?>
-<p:notesMaster xmlns:a="http://schemas.openxmlformats.org/drawingml/2006/main" xmlns:r="http://schemas.openxmlformats.org/officeDocument/2006/relationships" xmlns:p="http://schemas.openxmlformats.org/presentationml/2006/main">
+<file path=ppt/slideLayouts/slideLayout1.xml><?xml version="1.0" encoding="utf-8"?>
+<p:sldLayout xmlns:a="http://schemas.openxmlformats.org/drawingml/2006/main" xmlns:r="http://schemas.openxmlformats.org/officeDocument/2006/relationships" xmlns:p="http://schemas.openxmlformats.org/presentationml/2006/main" type="title" preserve="1">
+  <p:cSld name="Title Slide">
+    <p:spTree>
+      <p:nvGrpSpPr>
+        <p:cNvPr id="1" name=""/>
+        <p:cNvGrpSpPr/>
+        <p:nvPr/>
+      </p:nvGrpSpPr>
+      <p:grpSpPr>
+        <a:xfrm>
+          <a:off x="0" y="0"/>
+          <a:ext cx="0" cy="0"/>
+          <a:chOff x="0" y="0"/>
+          <a:chExt cx="0" cy="0"/>
+        </a:xfrm>
+      </p:grpSpPr>
+      <p:sp>
+        <p:nvSpPr>
+          <p:cNvPr id="2" name="Title 1"/>
+          <p:cNvSpPr>
+            <a:spLocks noGrp="1"/>
+          </p:cNvSpPr>
+          <p:nvPr>
+            <p:ph type="ctrTitle"/>
+          </p:nvPr>
+        </p:nvSpPr>
+        <p:spPr>
+          <a:xfrm>
+            <a:off x="685800" y="2130425"/>
+            <a:ext cx="7772400" cy="1470025"/>
+          </a:xfrm>
+        </p:spPr>
+        <p:txBody>
+          <a:bodyPr/>
+          <a:lstStyle/>
+          <a:p>
+            <a:r>
+              <a:rPr lang="en-US" smtClean="0"/>
+              <a:t>Click to edit Master title style</a:t>
+            </a:r>
+            <a:endParaRPr lang="en-US"/>
+          </a:p>
+        </p:txBody>
+      </p:sp>
+      <p:sp>
+        <p:nvSpPr>
+          <p:cNvPr id="3" name="Subtitle 2"/>
+          <p:cNvSpPr>
+            <a:spLocks noGrp="1"/>
+          </p:cNvSpPr>
+          <p:nvPr>
+            <p:ph type="subTitle" idx="1"/>
+          </p:nvPr>
+        </p:nvSpPr>
+        <p:spPr>
+          <a:xfrm>
+            <a:off x="1371600" y="3886200"/>
+            <a:ext cx="6400800" cy="1752600"/>
+          </a:xfrm>
+        </p:spPr>
+        <p:txBody>
+          <a:bodyPr/>
+          <a:lstStyle>
+            <a:lvl1pPr marL="0" indent="0" algn="ctr">
+              <a:buNone/>
+              <a:defRPr>
+                <a:solidFill>
+                  <a:schemeClr val="tx1">
+                    <a:tint val="75000"/>
+                  </a:schemeClr>
+                </a:solidFill>
+              </a:defRPr>
+            </a:lvl1pPr>
+            <a:lvl2pPr marL="457200" indent="0" algn="ctr">
+              <a:buNone/>
+              <a:defRPr>
+                <a:solidFill>
+                  <a:schemeClr val="tx1">
+                    <a:tint val="75000"/>
+                  </a:schemeClr>
+                </a:solidFill>
+              </a:defRPr>
+            </a:lvl2pPr>
+            <a:lvl3pPr marL="914400" indent="0" algn="ctr">
+              <a:buNone/>
+              <a:defRPr>
+                <a:solidFill>
+                  <a:schemeClr val="tx1">
+                    <a:tint val="75000"/>
+                  </a:schemeClr>
+                </a:solidFill>
+              </a:defRPr>
+            </a:lvl3pPr>
+            <a:lvl4pPr marL="1371600" indent="0" algn="ctr">
+              <a:buNone/>
+              <a:defRPr>
+                <a:solidFill>
+                  <a:schemeClr val="tx1">
+                    <a:tint val="75000"/>
+                  </a:schemeClr>
+                </a:solidFill>
+              </a:defRPr>
+            </a:lvl4pPr>
+            <a:lvl5pPr marL="1828800" indent="0" algn="ctr">
+              <a:buNone/>
+              <a:defRPr>
+                <a:solidFill>
+                  <a:schemeClr val="tx1">
+                    <a:tint val="75000"/>
+                  </a:schemeClr>
+                </a:solidFill>
+              </a:defRPr>
+            </a:lvl5pPr>
+            <a:lvl6pPr marL="2286000" indent="0" algn="ctr">
+              <a:buNone/>
+              <a:defRPr>
+                <a:solidFill>
+                  <a:schemeClr val="tx1">
+                    <a:tint val="75000"/>
+                  </a:schemeClr>
+                </a:solidFill>
+              </a:defRPr>
+            </a:lvl6pPr>
+            <a:lvl7pPr marL="2743200" indent="0" algn="ctr">
+              <a:buNone/>
+              <a:defRPr>
+                <a:solidFill>
+                  <a:schemeClr val="tx1">
+                    <a:tint val="75000"/>
+                  </a:schemeClr>
+                </a:solidFill>
+              </a:defRPr>
+            </a:lvl7pPr>
+            <a:lvl8pPr marL="3200400" indent="0" algn="ctr">
+              <a:buNone/>
+              <a:defRPr>
+                <a:solidFill>
+                  <a:schemeClr val="tx1">
+                    <a:tint val="75000"/>
+                  </a:schemeClr>
+                </a:solidFill>
+              </a:defRPr>
+            </a:lvl8pPr>
+            <a:lvl9pPr marL="3657600" indent="0" algn="ctr">
+              <a:buNone/>
+              <a:defRPr>
+                <a:solidFill>
+                  <a:schemeClr val="tx1">
+                    <a:tint val="75000"/>
+                  </a:schemeClr>
+                </a:solidFill>
+              </a:defRPr>
+            </a:lvl9pPr>
+          </a:lstStyle>
+          <a:p>
+            <a:r>
+              <a:rPr lang="en-US" smtClean="0"/>
+              <a:t>Click to edit Master subtitle style</a:t>
+            </a:r>
+            <a:endParaRPr lang="en-US"/>
+          </a:p>
+        </p:txBody>
+      </p:sp>
+      <p:sp>
+        <p:nvSpPr>
+          <p:cNvPr id="4" name="Date Placeholder 3"/>
+          <p:cNvSpPr>
+            <a:spLocks noGrp="1"/>
+          </p:cNvSpPr>
+          <p:nvPr>
+            <p:ph type="dt" sz="half" idx="10"/>
+          </p:nvPr>
+        </p:nvSpPr>
+        <p:spPr/>
+        <p:txBody>
+          <a:bodyPr/>
+          <a:lstStyle/>
+          <a:p>
+            <a:fld id="{5BCAD085-E8A6-8845-BD4E-CB4CCA059FC4}" type="datetimeFigureOut">
+              <a:rPr lang="en-US" smtClean="0"/>
+              <a:t>1/27/13</a:t>
+            </a:fld>
+            <a:endParaRPr lang="en-US"/>
+          </a:p>
+        </p:txBody>
+      </p:sp>
+      <p:sp>
+        <p:nvSpPr>
+          <p:cNvPr id="5" name="Footer Placeholder 4"/>
+          <p:cNvSpPr>
+            <a:spLocks noGrp="1"/>
+          </p:cNvSpPr>
+          <p:nvPr>
+            <p:ph type="ftr" sz="quarter" idx="11"/>
+          </p:nvPr>
+        </p:nvSpPr>
+        <p:spPr/>
+        <p:txBody>
+          <a:bodyPr/>
+          <a:lstStyle/>
+          <a:p>
+            <a:endParaRPr lang="en-US"/>
+          </a:p>
+        </p:txBody>
+      </p:sp>
+      <p:sp>
+        <p:nvSpPr>
+          <p:cNvPr id="6" name="Slide Number Placeholder 5"/>
+          <p:cNvSpPr>
+            <a:spLocks noGrp="1"/>
+          </p:cNvSpPr>
+          <p:nvPr>
+            <p:ph type="sldNum" sz="quarter" idx="12"/>
+          </p:nvPr>
+        </p:nvSpPr>
+        <p:spPr/>
+        <p:txBody>
+          <a:bodyPr/>
+          <a:lstStyle/>
+          <a:p>
+            <a:fld id="{C1FF6DA9-008F-8B48-92A6-B652298478BF}" type="slidenum">
+              <a:rPr lang="en-US" smtClean="0"/>
+              <a:t>‹#›</a:t>
+            </a:fld>
+            <a:endParaRPr lang="en-US"/>
+          </a:p>
+        </p:txBody>
+      </p:sp>
+    </p:spTree>
+    <p:extLst>
+      <p:ext uri="{BB962C8B-B14F-4D97-AF65-F5344CB8AC3E}">
+        <p14:creationId xmlns:p14="http://schemas.microsoft.com/office/powerpoint/2010/main" val="3168075583"/>
+      </p:ext>
+    </p:extLst>
+  </p:cSld>
+  <p:clrMapOvr>
+    <a:masterClrMapping/>
+  </p:clrMapOvr>
+</p:sldLayout>
+</file>
+
+<file path=ppt/slideLayouts/slideLayout10.xml><?xml version="1.0" encoding="utf-8"?>
+<p:sldLayout xmlns:a="http://schemas.openxmlformats.org/drawingml/2006/main" xmlns:r="http://schemas.openxmlformats.org/officeDocument/2006/relationships" xmlns:p="http://schemas.openxmlformats.org/presentationml/2006/main" type="vertTx" preserve="1">
+  <p:cSld name="Title and Vertical Text">
+    <p:spTree>
+      <p:nvGrpSpPr>
+        <p:cNvPr id="1" name=""/>
+        <p:cNvGrpSpPr/>
+        <p:nvPr/>
+      </p:nvGrpSpPr>
+      <p:grpSpPr>
+        <a:xfrm>
+          <a:off x="0" y="0"/>
+          <a:ext cx="0" cy="0"/>
+          <a:chOff x="0" y="0"/>
+          <a:chExt cx="0" cy="0"/>
+        </a:xfrm>
+      </p:grpSpPr>
+      <p:sp>
+        <p:nvSpPr>
+          <p:cNvPr id="2" name="Title 1"/>
+          <p:cNvSpPr>
+            <a:spLocks noGrp="1"/>
+          </p:cNvSpPr>
+          <p:nvPr>
+            <p:ph type="title"/>
+          </p:nvPr>
+        </p:nvSpPr>
+        <p:spPr/>
+        <p:txBody>
+          <a:bodyPr/>
+          <a:lstStyle/>
+          <a:p>
+            <a:r>
+              <a:rPr lang="en-US" smtClean="0"/>
+              <a:t>Click to edit Master title style</a:t>
+            </a:r>
+            <a:endParaRPr lang="en-US"/>
+          </a:p>
+        </p:txBody>
+      </p:sp>
+      <p:sp>
+        <p:nvSpPr>
+          <p:cNvPr id="3" name="Vertical Text Placeholder 2"/>
+          <p:cNvSpPr>
+            <a:spLocks noGrp="1"/>
+          </p:cNvSpPr>
+          <p:nvPr>
+            <p:ph type="body" orient="vert" idx="1"/>
+          </p:nvPr>
+        </p:nvSpPr>
+        <p:spPr/>
+        <p:txBody>
+          <a:bodyPr vert="eaVert"/>
+          <a:lstStyle/>
+          <a:p>
+            <a:pPr lvl="0"/>
+            <a:r>
+              <a:rPr lang="en-US" smtClean="0"/>
+              <a:t>Click to edit Master text styles</a:t>
+            </a:r>
+          </a:p>
+          <a:p>
+            <a:pPr lvl="1"/>
+            <a:r>
+              <a:rPr lang="en-US" smtClean="0"/>
+              <a:t>Second level</a:t>
+            </a:r>
+          </a:p>
+          <a:p>
+            <a:pPr lvl="2"/>
+            <a:r>
+              <a:rPr lang="en-US" smtClean="0"/>
+              <a:t>Third level</a:t>
+            </a:r>
+          </a:p>
+          <a:p>
+            <a:pPr lvl="3"/>
+            <a:r>
+              <a:rPr lang="en-US" smtClean="0"/>
+              <a:t>Fourth level</a:t>
+            </a:r>
+          </a:p>
+          <a:p>
+            <a:pPr lvl="4"/>
+            <a:r>
+              <a:rPr lang="en-US" smtClean="0"/>
+              <a:t>Fifth level</a:t>
+            </a:r>
+            <a:endParaRPr lang="en-US"/>
+          </a:p>
+        </p:txBody>
+      </p:sp>
+      <p:sp>
+        <p:nvSpPr>
+          <p:cNvPr id="4" name="Date Placeholder 3"/>
+          <p:cNvSpPr>
+            <a:spLocks noGrp="1"/>
+          </p:cNvSpPr>
+          <p:nvPr>
+            <p:ph type="dt" sz="half" idx="10"/>
+          </p:nvPr>
+        </p:nvSpPr>
+        <p:spPr/>
+        <p:txBody>
+          <a:bodyPr/>
+          <a:lstStyle/>
+          <a:p>
+            <a:fld id="{5BCAD085-E8A6-8845-BD4E-CB4CCA059FC4}" type="datetimeFigureOut">
+              <a:rPr lang="en-US" smtClean="0"/>
+              <a:t>1/27/13</a:t>
+            </a:fld>
+            <a:endParaRPr lang="en-US"/>
+          </a:p>
+        </p:txBody>
+      </p:sp>
+      <p:sp>
+        <p:nvSpPr>
+          <p:cNvPr id="5" name="Footer Placeholder 4"/>
+          <p:cNvSpPr>
+            <a:spLocks noGrp="1"/>
+          </p:cNvSpPr>
+          <p:nvPr>
+            <p:ph type="ftr" sz="quarter" idx="11"/>
+          </p:nvPr>
+        </p:nvSpPr>
+        <p:spPr/>
+        <p:txBody>
+          <a:bodyPr/>
+          <a:lstStyle/>
+          <a:p>
+            <a:endParaRPr lang="en-US"/>
+          </a:p>
+        </p:txBody>
+      </p:sp>
+      <p:sp>
+        <p:nvSpPr>
+          <p:cNvPr id="6" name="Slide Number Placeholder 5"/>
+          <p:cNvSpPr>
+            <a:spLocks noGrp="1"/>
+          </p:cNvSpPr>
+          <p:nvPr>
+            <p:ph type="sldNum" sz="quarter" idx="12"/>
+          </p:nvPr>
+        </p:nvSpPr>
+        <p:spPr/>
+        <p:txBody>
+          <a:bodyPr/>
+          <a:lstStyle/>
+          <a:p>
+            <a:fld id="{C1FF6DA9-008F-8B48-92A6-B652298478BF}" type="slidenum">
+              <a:rPr lang="en-US" smtClean="0"/>
+              <a:t>‹#›</a:t>
+            </a:fld>
+            <a:endParaRPr lang="en-US"/>
+          </a:p>
+        </p:txBody>
+      </p:sp>
+    </p:spTree>
+    <p:extLst>
+      <p:ext uri="{BB962C8B-B14F-4D97-AF65-F5344CB8AC3E}">
+        <p14:creationId xmlns:p14="http://schemas.microsoft.com/office/powerpoint/2010/main" val="2910927964"/>
+      </p:ext>
+    </p:extLst>
+  </p:cSld>
+  <p:clrMapOvr>
+    <a:masterClrMapping/>
+  </p:clrMapOvr>
+</p:sldLayout>
+</file>
+
+<file path=ppt/slideLayouts/slideLayout11.xml><?xml version="1.0" encoding="utf-8"?>
+<p:sldLayout xmlns:a="http://schemas.openxmlformats.org/drawingml/2006/main" xmlns:r="http://schemas.openxmlformats.org/officeDocument/2006/relationships" xmlns:p="http://schemas.openxmlformats.org/presentationml/2006/main" type="vertTitleAndTx" preserve="1">
+  <p:cSld name="Vertical Title and Text">
+    <p:spTree>
+      <p:nvGrpSpPr>
+        <p:cNvPr id="1" name=""/>
+        <p:cNvGrpSpPr/>
+        <p:nvPr/>
+      </p:nvGrpSpPr>
+      <p:grpSpPr>
+        <a:xfrm>
+          <a:off x="0" y="0"/>
+          <a:ext cx="0" cy="0"/>
+          <a:chOff x="0" y="0"/>
+          <a:chExt cx="0" cy="0"/>
+        </a:xfrm>
+      </p:grpSpPr>
+      <p:sp>
+        <p:nvSpPr>
+          <p:cNvPr id="2" name="Vertical Title 1"/>
+          <p:cNvSpPr>
+            <a:spLocks noGrp="1"/>
+          </p:cNvSpPr>
+          <p:nvPr>
+            <p:ph type="title" orient="vert"/>
+          </p:nvPr>
+        </p:nvSpPr>
+        <p:spPr>
+          <a:xfrm>
+            <a:off x="6629400" y="274638"/>
+            <a:ext cx="2057400" cy="5851525"/>
+          </a:xfrm>
+        </p:spPr>
+        <p:txBody>
+          <a:bodyPr vert="eaVert"/>
+          <a:lstStyle/>
+          <a:p>
+            <a:r>
+              <a:rPr lang="en-US" smtClean="0"/>
+              <a:t>Click to edit Master title style</a:t>
+            </a:r>
+            <a:endParaRPr lang="en-US"/>
+          </a:p>
+        </p:txBody>
+      </p:sp>
+      <p:sp>
+        <p:nvSpPr>
+          <p:cNvPr id="3" name="Vertical Text Placeholder 2"/>
+          <p:cNvSpPr>
+            <a:spLocks noGrp="1"/>
+          </p:cNvSpPr>
+          <p:nvPr>
+            <p:ph type="body" orient="vert" idx="1"/>
+          </p:nvPr>
+        </p:nvSpPr>
+        <p:spPr>
+          <a:xfrm>
+            <a:off x="457200" y="274638"/>
+            <a:ext cx="6019800" cy="5851525"/>
+          </a:xfrm>
+        </p:spPr>
+        <p:txBody>
+          <a:bodyPr vert="eaVert"/>
+          <a:lstStyle/>
+          <a:p>
+            <a:pPr lvl="0"/>
+            <a:r>
+              <a:rPr lang="en-US" smtClean="0"/>
+              <a:t>Click to edit Master text styles</a:t>
+            </a:r>
+          </a:p>
+          <a:p>
+            <a:pPr lvl="1"/>
+            <a:r>
+              <a:rPr lang="en-US" smtClean="0"/>
+              <a:t>Second level</a:t>
+            </a:r>
+          </a:p>
+          <a:p>
+            <a:pPr lvl="2"/>
+            <a:r>
+              <a:rPr lang="en-US" smtClean="0"/>
+              <a:t>Third level</a:t>
+            </a:r>
+          </a:p>
+          <a:p>
+            <a:pPr lvl="3"/>
+            <a:r>
+              <a:rPr lang="en-US" smtClean="0"/>
+              <a:t>Fourth level</a:t>
+            </a:r>
+          </a:p>
+          <a:p>
+            <a:pPr lvl="4"/>
+            <a:r>
+              <a:rPr lang="en-US" smtClean="0"/>
+              <a:t>Fifth level</a:t>
+            </a:r>
+            <a:endParaRPr lang="en-US"/>
+          </a:p>
+        </p:txBody>
+      </p:sp>
+      <p:sp>
+        <p:nvSpPr>
+          <p:cNvPr id="4" name="Date Placeholder 3"/>
+          <p:cNvSpPr>
+            <a:spLocks noGrp="1"/>
+          </p:cNvSpPr>
+          <p:nvPr>
+            <p:ph type="dt" sz="half" idx="10"/>
+          </p:nvPr>
+        </p:nvSpPr>
+        <p:spPr/>
+        <p:txBody>
+          <a:bodyPr/>
+          <a:lstStyle/>
+          <a:p>
+            <a:fld id="{5BCAD085-E8A6-8845-BD4E-CB4CCA059FC4}" type="datetimeFigureOut">
+              <a:rPr lang="en-US" smtClean="0"/>
+              <a:t>1/27/13</a:t>
+            </a:fld>
+            <a:endParaRPr lang="en-US"/>
+          </a:p>
+        </p:txBody>
+      </p:sp>
+      <p:sp>
+        <p:nvSpPr>
+          <p:cNvPr id="5" name="Footer Placeholder 4"/>
+          <p:cNvSpPr>
+            <a:spLocks noGrp="1"/>
+          </p:cNvSpPr>
+          <p:nvPr>
+            <p:ph type="ftr" sz="quarter" idx="11"/>
+          </p:nvPr>
+        </p:nvSpPr>
+        <p:spPr/>
+        <p:txBody>
+          <a:bodyPr/>
+          <a:lstStyle/>
+          <a:p>
+            <a:endParaRPr lang="en-US"/>
+          </a:p>
+        </p:txBody>
+      </p:sp>
+      <p:sp>
+        <p:nvSpPr>
+          <p:cNvPr id="6" name="Slide Number Placeholder 5"/>
+          <p:cNvSpPr>
+            <a:spLocks noGrp="1"/>
+          </p:cNvSpPr>
+          <p:nvPr>
+            <p:ph type="sldNum" sz="quarter" idx="12"/>
+          </p:nvPr>
+        </p:nvSpPr>
+        <p:spPr/>
+        <p:txBody>
+          <a:bodyPr/>
+          <a:lstStyle/>
+          <a:p>
+            <a:fld id="{C1FF6DA9-008F-8B48-92A6-B652298478BF}" type="slidenum">
+              <a:rPr lang="en-US" smtClean="0"/>
+              <a:t>‹#›</a:t>
+            </a:fld>
+            <a:endParaRPr lang="en-US"/>
+          </a:p>
+        </p:txBody>
+      </p:sp>
+    </p:spTree>
+    <p:extLst>
+      <p:ext uri="{BB962C8B-B14F-4D97-AF65-F5344CB8AC3E}">
+        <p14:creationId xmlns:p14="http://schemas.microsoft.com/office/powerpoint/2010/main" val="3612223792"/>
+      </p:ext>
+    </p:extLst>
+  </p:cSld>
+  <p:clrMapOvr>
+    <a:masterClrMapping/>
+  </p:clrMapOvr>
+</p:sldLayout>
+</file>
+
+<file path=ppt/slideLayouts/slideLayout2.xml><?xml version="1.0" encoding="utf-8"?>
+<p:sldLayout xmlns:a="http://schemas.openxmlformats.org/drawingml/2006/main" xmlns:r="http://schemas.openxmlformats.org/officeDocument/2006/relationships" xmlns:p="http://schemas.openxmlformats.org/presentationml/2006/main" type="obj" preserve="1">
+  <p:cSld name="Title and Content">
+    <p:spTree>
+      <p:nvGrpSpPr>
+        <p:cNvPr id="1" name=""/>
+        <p:cNvGrpSpPr/>
+        <p:nvPr/>
+      </p:nvGrpSpPr>
+      <p:grpSpPr>
+        <a:xfrm>
+          <a:off x="0" y="0"/>
+          <a:ext cx="0" cy="0"/>
+          <a:chOff x="0" y="0"/>
+          <a:chExt cx="0" cy="0"/>
+        </a:xfrm>
+      </p:grpSpPr>
+      <p:sp>
+        <p:nvSpPr>
+          <p:cNvPr id="2" name="Title 1"/>
+          <p:cNvSpPr>
+            <a:spLocks noGrp="1"/>
+          </p:cNvSpPr>
+          <p:nvPr>
+            <p:ph type="title"/>
+          </p:nvPr>
+        </p:nvSpPr>
+        <p:spPr/>
+        <p:txBody>
+          <a:bodyPr/>
+          <a:lstStyle/>
+          <a:p>
+            <a:r>
+              <a:rPr lang="en-US" smtClean="0"/>
+              <a:t>Click to edit Master title style</a:t>
+            </a:r>
+            <a:endParaRPr lang="en-US"/>
+          </a:p>
+        </p:txBody>
+      </p:sp>
+      <p:sp>
+        <p:nvSpPr>
+          <p:cNvPr id="3" name="Content Placeholder 2"/>
+          <p:cNvSpPr>
+            <a:spLocks noGrp="1"/>
+          </p:cNvSpPr>
+          <p:nvPr>
+            <p:ph idx="1"/>
+          </p:nvPr>
+        </p:nvSpPr>
+        <p:spPr/>
+        <p:txBody>
+          <a:bodyPr/>
+          <a:lstStyle/>
+          <a:p>
+            <a:pPr lvl="0"/>
+            <a:r>
+              <a:rPr lang="en-US" smtClean="0"/>
+              <a:t>Click to edit Master text styles</a:t>
+            </a:r>
+          </a:p>
+          <a:p>
+            <a:pPr lvl="1"/>
+            <a:r>
+              <a:rPr lang="en-US" smtClean="0"/>
+              <a:t>Second level</a:t>
+            </a:r>
+          </a:p>
+          <a:p>
+            <a:pPr lvl="2"/>
+            <a:r>
+              <a:rPr lang="en-US" smtClean="0"/>
+              <a:t>Third level</a:t>
+            </a:r>
+          </a:p>
+          <a:p>
+            <a:pPr lvl="3"/>
+            <a:r>
+              <a:rPr lang="en-US" smtClean="0"/>
+              <a:t>Fourth level</a:t>
+            </a:r>
+          </a:p>
+          <a:p>
+            <a:pPr lvl="4"/>
+            <a:r>
+              <a:rPr lang="en-US" smtClean="0"/>
+              <a:t>Fifth level</a:t>
+            </a:r>
+            <a:endParaRPr lang="en-US"/>
+          </a:p>
+        </p:txBody>
+      </p:sp>
+      <p:sp>
+        <p:nvSpPr>
+          <p:cNvPr id="4" name="Date Placeholder 3"/>
+          <p:cNvSpPr>
+            <a:spLocks noGrp="1"/>
+          </p:cNvSpPr>
+          <p:nvPr>
+            <p:ph type="dt" sz="half" idx="10"/>
+          </p:nvPr>
+        </p:nvSpPr>
+        <p:spPr/>
+        <p:txBody>
+          <a:bodyPr/>
+          <a:lstStyle/>
+          <a:p>
+            <a:fld id="{5BCAD085-E8A6-8845-BD4E-CB4CCA059FC4}" type="datetimeFigureOut">
+              <a:rPr lang="en-US" smtClean="0"/>
+              <a:t>1/27/13</a:t>
+            </a:fld>
+            <a:endParaRPr lang="en-US"/>
+          </a:p>
+        </p:txBody>
+      </p:sp>
+      <p:sp>
+        <p:nvSpPr>
+          <p:cNvPr id="5" name="Footer Placeholder 4"/>
+          <p:cNvSpPr>
+            <a:spLocks noGrp="1"/>
+          </p:cNvSpPr>
+          <p:nvPr>
+            <p:ph type="ftr" sz="quarter" idx="11"/>
+          </p:nvPr>
+        </p:nvSpPr>
+        <p:spPr/>
+        <p:txBody>
+          <a:bodyPr/>
+          <a:lstStyle/>
+          <a:p>
+            <a:endParaRPr lang="en-US"/>
+          </a:p>
+        </p:txBody>
+      </p:sp>
+      <p:sp>
+        <p:nvSpPr>
+          <p:cNvPr id="6" name="Slide Number Placeholder 5"/>
+          <p:cNvSpPr>
+            <a:spLocks noGrp="1"/>
+          </p:cNvSpPr>
+          <p:nvPr>
+            <p:ph type="sldNum" sz="quarter" idx="12"/>
+          </p:nvPr>
+        </p:nvSpPr>
+        <p:spPr/>
+        <p:txBody>
+          <a:bodyPr/>
+          <a:lstStyle/>
+          <a:p>
+            <a:fld id="{C1FF6DA9-008F-8B48-92A6-B652298478BF}" type="slidenum">
+              <a:rPr lang="en-US" smtClean="0"/>
+              <a:t>‹#›</a:t>
+            </a:fld>
+            <a:endParaRPr lang="en-US"/>
+          </a:p>
+        </p:txBody>
+      </p:sp>
+    </p:spTree>
+    <p:extLst>
+      <p:ext uri="{BB962C8B-B14F-4D97-AF65-F5344CB8AC3E}">
+        <p14:creationId xmlns:p14="http://schemas.microsoft.com/office/powerpoint/2010/main" val="2614314258"/>
+      </p:ext>
+    </p:extLst>
+  </p:cSld>
+  <p:clrMapOvr>
+    <a:masterClrMapping/>
+  </p:clrMapOvr>
+</p:sldLayout>
+</file>
+
+<file path=ppt/slideLayouts/slideLayout3.xml><?xml version="1.0" encoding="utf-8"?>
+<p:sldLayout xmlns:a="http://schemas.openxmlformats.org/drawingml/2006/main" xmlns:r="http://schemas.openxmlformats.org/officeDocument/2006/relationships" xmlns:p="http://schemas.openxmlformats.org/presentationml/2006/main" type="secHead" preserve="1">
+  <p:cSld name="Section Header">
+    <p:spTree>
+      <p:nvGrpSpPr>
+        <p:cNvPr id="1" name=""/>
+        <p:cNvGrpSpPr/>
+        <p:nvPr/>
+      </p:nvGrpSpPr>
+      <p:grpSpPr>
+        <a:xfrm>
+          <a:off x="0" y="0"/>
+          <a:ext cx="0" cy="0"/>
+          <a:chOff x="0" y="0"/>
+          <a:chExt cx="0" cy="0"/>
+        </a:xfrm>
+      </p:grpSpPr>
+      <p:sp>
+        <p:nvSpPr>
+          <p:cNvPr id="2" name="Title 1"/>
+          <p:cNvSpPr>
+            <a:spLocks noGrp="1"/>
+          </p:cNvSpPr>
+          <p:nvPr>
+            <p:ph type="title"/>
+          </p:nvPr>
+        </p:nvSpPr>
+        <p:spPr>
+          <a:xfrm>
+            <a:off x="722313" y="4406900"/>
+            <a:ext cx="7772400" cy="1362075"/>
+          </a:xfrm>
+        </p:spPr>
+        <p:txBody>
+          <a:bodyPr anchor="t"/>
+          <a:lstStyle>
+            <a:lvl1pPr algn="l">
+              <a:defRPr sz="4000" b="1" cap="all"/>
+            </a:lvl1pPr>
+          </a:lstStyle>
+          <a:p>
+            <a:r>
+              <a:rPr lang="en-US" smtClean="0"/>
+              <a:t>Click to edit Master title style</a:t>
+            </a:r>
+            <a:endParaRPr lang="en-US"/>
+          </a:p>
+        </p:txBody>
+      </p:sp>
+      <p:sp>
+        <p:nvSpPr>
+          <p:cNvPr id="3" name="Text Placeholder 2"/>
+          <p:cNvSpPr>
+            <a:spLocks noGrp="1"/>
+          </p:cNvSpPr>
+          <p:nvPr>
+            <p:ph type="body" idx="1"/>
+          </p:nvPr>
+        </p:nvSpPr>
+        <p:spPr>
+          <a:xfrm>
+            <a:off x="722313" y="2906713"/>
+            <a:ext cx="7772400" cy="1500187"/>
+          </a:xfrm>
+        </p:spPr>
+        <p:txBody>
+          <a:bodyPr anchor="b"/>
+          <a:lstStyle>
+            <a:lvl1pPr marL="0" indent="0">
+              <a:buNone/>
+              <a:defRPr sz="2000">
+                <a:solidFill>
+                  <a:schemeClr val="tx1">
+                    <a:tint val="75000"/>
+                  </a:schemeClr>
+                </a:solidFill>
+              </a:defRPr>
+            </a:lvl1pPr>
+            <a:lvl2pPr marL="457200" indent="0">
+              <a:buNone/>
+              <a:defRPr sz="1800">
+                <a:solidFill>
+                  <a:schemeClr val="tx1">
+                    <a:tint val="75000"/>
+                  </a:schemeClr>
+                </a:solidFill>
+              </a:defRPr>
+            </a:lvl2pPr>
+            <a:lvl3pPr marL="914400" indent="0">
+              <a:buNone/>
+              <a:defRPr sz="1600">
+                <a:solidFill>
+                  <a:schemeClr val="tx1">
+                    <a:tint val="75000"/>
+                  </a:schemeClr>
+                </a:solidFill>
+              </a:defRPr>
+            </a:lvl3pPr>
+            <a:lvl4pPr marL="1371600" indent="0">
+              <a:buNone/>
+              <a:defRPr sz="1400">
+                <a:solidFill>
+                  <a:schemeClr val="tx1">
+                    <a:tint val="75000"/>
+                  </a:schemeClr>
+                </a:solidFill>
+              </a:defRPr>
+            </a:lvl4pPr>
+            <a:lvl5pPr marL="1828800" indent="0">
+              <a:buNone/>
+              <a:defRPr sz="1400">
+                <a:solidFill>
+                  <a:schemeClr val="tx1">
+                    <a:tint val="75000"/>
+                  </a:schemeClr>
+                </a:solidFill>
+              </a:defRPr>
+            </a:lvl5pPr>
+            <a:lvl6pPr marL="2286000" indent="0">
+              <a:buNone/>
+              <a:defRPr sz="1400">
+                <a:solidFill>
+                  <a:schemeClr val="tx1">
+                    <a:tint val="75000"/>
+                  </a:schemeClr>
+                </a:solidFill>
+              </a:defRPr>
+            </a:lvl6pPr>
+            <a:lvl7pPr marL="2743200" indent="0">
+              <a:buNone/>
+              <a:defRPr sz="1400">
+                <a:solidFill>
+                  <a:schemeClr val="tx1">
+                    <a:tint val="75000"/>
+                  </a:schemeClr>
+                </a:solidFill>
+              </a:defRPr>
+            </a:lvl7pPr>
+            <a:lvl8pPr marL="3200400" indent="0">
+              <a:buNone/>
+              <a:defRPr sz="1400">
+                <a:solidFill>
+                  <a:schemeClr val="tx1">
+                    <a:tint val="75000"/>
+                  </a:schemeClr>
+                </a:solidFill>
+              </a:defRPr>
+            </a:lvl8pPr>
+            <a:lvl9pPr marL="3657600" indent="0">
+              <a:buNone/>
+              <a:defRPr sz="1400">
+                <a:solidFill>
+                  <a:schemeClr val="tx1">
+                    <a:tint val="75000"/>
+                  </a:schemeClr>
+                </a:solidFill>
+              </a:defRPr>
+            </a:lvl9pPr>
+          </a:lstStyle>
+          <a:p>
+            <a:pPr lvl="0"/>
+            <a:r>
+              <a:rPr lang="en-US" smtClean="0"/>
+              <a:t>Click to edit Master text styles</a:t>
+            </a:r>
+          </a:p>
+        </p:txBody>
+      </p:sp>
+      <p:sp>
+        <p:nvSpPr>
+          <p:cNvPr id="4" name="Date Placeholder 3"/>
+          <p:cNvSpPr>
+            <a:spLocks noGrp="1"/>
+          </p:cNvSpPr>
+          <p:nvPr>
+            <p:ph type="dt" sz="half" idx="10"/>
+          </p:nvPr>
+        </p:nvSpPr>
+        <p:spPr/>
+        <p:txBody>
+          <a:bodyPr/>
+          <a:lstStyle/>
+          <a:p>
+            <a:fld id="{5BCAD085-E8A6-8845-BD4E-CB4CCA059FC4}" type="datetimeFigureOut">
+              <a:rPr lang="en-US" smtClean="0"/>
+              <a:t>1/27/13</a:t>
+            </a:fld>
+            <a:endParaRPr lang="en-US"/>
+          </a:p>
+        </p:txBody>
+      </p:sp>
+      <p:sp>
+        <p:nvSpPr>
+          <p:cNvPr id="5" name="Footer Placeholder 4"/>
+          <p:cNvSpPr>
+            <a:spLocks noGrp="1"/>
+          </p:cNvSpPr>
+          <p:nvPr>
+            <p:ph type="ftr" sz="quarter" idx="11"/>
+          </p:nvPr>
+        </p:nvSpPr>
+        <p:spPr/>
+        <p:txBody>
+          <a:bodyPr/>
+          <a:lstStyle/>
+          <a:p>
+            <a:endParaRPr lang="en-US"/>
+          </a:p>
+        </p:txBody>
+      </p:sp>
+      <p:sp>
+        <p:nvSpPr>
+          <p:cNvPr id="6" name="Slide Number Placeholder 5"/>
+          <p:cNvSpPr>
+            <a:spLocks noGrp="1"/>
+          </p:cNvSpPr>
+          <p:nvPr>
+            <p:ph type="sldNum" sz="quarter" idx="12"/>
+          </p:nvPr>
+        </p:nvSpPr>
+        <p:spPr/>
+        <p:txBody>
+          <a:bodyPr/>
+          <a:lstStyle/>
+          <a:p>
+            <a:fld id="{C1FF6DA9-008F-8B48-92A6-B652298478BF}" type="slidenum">
+              <a:rPr lang="en-US" smtClean="0"/>
+              <a:t>‹#›</a:t>
+            </a:fld>
+            <a:endParaRPr lang="en-US"/>
+          </a:p>
+        </p:txBody>
+      </p:sp>
+    </p:spTree>
+    <p:extLst>
+      <p:ext uri="{BB962C8B-B14F-4D97-AF65-F5344CB8AC3E}">
+        <p14:creationId xmlns:p14="http://schemas.microsoft.com/office/powerpoint/2010/main" val="960648375"/>
+      </p:ext>
+    </p:extLst>
+  </p:cSld>
+  <p:clrMapOvr>
+    <a:masterClrMapping/>
+  </p:clrMapOvr>
+</p:sldLayout>
+</file>
+
+<file path=ppt/slideLayouts/slideLayout4.xml><?xml version="1.0" encoding="utf-8"?>
+<p:sldLayout xmlns:a="http://schemas.openxmlformats.org/drawingml/2006/main" xmlns:r="http://schemas.openxmlformats.org/officeDocument/2006/relationships" xmlns:p="http://schemas.openxmlformats.org/presentationml/2006/main" type="twoObj" preserve="1">
+  <p:cSld name="Two Content">
+    <p:spTree>
+      <p:nvGrpSpPr>
+        <p:cNvPr id="1" name=""/>
+        <p:cNvGrpSpPr/>
+        <p:nvPr/>
+      </p:nvGrpSpPr>
+      <p:grpSpPr>
+        <a:xfrm>
+          <a:off x="0" y="0"/>
+          <a:ext cx="0" cy="0"/>
+          <a:chOff x="0" y="0"/>
+          <a:chExt cx="0" cy="0"/>
+        </a:xfrm>
+      </p:grpSpPr>
+      <p:sp>
+        <p:nvSpPr>
+          <p:cNvPr id="2" name="Title 1"/>
+          <p:cNvSpPr>
+            <a:spLocks noGrp="1"/>
+          </p:cNvSpPr>
+          <p:nvPr>
+            <p:ph type="title"/>
+          </p:nvPr>
+        </p:nvSpPr>
+        <p:spPr/>
+        <p:txBody>
+          <a:bodyPr/>
+          <a:lstStyle/>
+          <a:p>
+            <a:r>
+              <a:rPr lang="en-US" smtClean="0"/>
+              <a:t>Click to edit Master title style</a:t>
+            </a:r>
+            <a:endParaRPr lang="en-US"/>
+          </a:p>
+        </p:txBody>
+      </p:sp>
+      <p:sp>
+        <p:nvSpPr>
+          <p:cNvPr id="3" name="Content Placeholder 2"/>
+          <p:cNvSpPr>
+            <a:spLocks noGrp="1"/>
+          </p:cNvSpPr>
+          <p:nvPr>
+            <p:ph sz="half" idx="1"/>
+          </p:nvPr>
+        </p:nvSpPr>
+        <p:spPr>
+          <a:xfrm>
+            <a:off x="457200" y="1600200"/>
+            <a:ext cx="4038600" cy="4525963"/>
+          </a:xfrm>
+        </p:spPr>
+        <p:txBody>
+          <a:bodyPr/>
+          <a:lstStyle>
+            <a:lvl1pPr>
+              <a:defRPr sz="2800"/>
+            </a:lvl1pPr>
+            <a:lvl2pPr>
+              <a:defRPr sz="2400"/>
+            </a:lvl2pPr>
+            <a:lvl3pPr>
+              <a:defRPr sz="2000"/>
+            </a:lvl3pPr>
+            <a:lvl4pPr>
+              <a:defRPr sz="1800"/>
+            </a:lvl4pPr>
+            <a:lvl5pPr>
+              <a:defRPr sz="1800"/>
+            </a:lvl5pPr>
+            <a:lvl6pPr>
+              <a:defRPr sz="1800"/>
+            </a:lvl6pPr>
+            <a:lvl7pPr>
+              <a:defRPr sz="1800"/>
+            </a:lvl7pPr>
+            <a:lvl8pPr>
+              <a:defRPr sz="1800"/>
+            </a:lvl8pPr>
+            <a:lvl9pPr>
+              <a:defRPr sz="1800"/>
+            </a:lvl9pPr>
+          </a:lstStyle>
+          <a:p>
+            <a:pPr lvl="0"/>
+            <a:r>
+              <a:rPr lang="en-US" smtClean="0"/>
+              <a:t>Click to edit Master text styles</a:t>
+            </a:r>
+          </a:p>
+          <a:p>
+            <a:pPr lvl="1"/>
+            <a:r>
+              <a:rPr lang="en-US" smtClean="0"/>
+              <a:t>Second level</a:t>
+            </a:r>
+          </a:p>
+          <a:p>
+            <a:pPr lvl="2"/>
+            <a:r>
+              <a:rPr lang="en-US" smtClean="0"/>
+              <a:t>Third level</a:t>
+            </a:r>
+          </a:p>
+          <a:p>
+            <a:pPr lvl="3"/>
+            <a:r>
+              <a:rPr lang="en-US" smtClean="0"/>
+              <a:t>Fourth level</a:t>
+            </a:r>
+          </a:p>
+          <a:p>
+            <a:pPr lvl="4"/>
+            <a:r>
+              <a:rPr lang="en-US" smtClean="0"/>
+              <a:t>Fifth level</a:t>
+            </a:r>
+            <a:endParaRPr lang="en-US"/>
+          </a:p>
+        </p:txBody>
+      </p:sp>
+      <p:sp>
+        <p:nvSpPr>
+          <p:cNvPr id="4" name="Content Placeholder 3"/>
+          <p:cNvSpPr>
+            <a:spLocks noGrp="1"/>
+          </p:cNvSpPr>
+          <p:nvPr>
+            <p:ph sz="half" idx="2"/>
+          </p:nvPr>
+        </p:nvSpPr>
+        <p:spPr>
+          <a:xfrm>
+            <a:off x="4648200" y="1600200"/>
+            <a:ext cx="4038600" cy="4525963"/>
+          </a:xfrm>
+        </p:spPr>
+        <p:txBody>
+          <a:bodyPr/>
+          <a:lstStyle>
+            <a:lvl1pPr>
+              <a:defRPr sz="2800"/>
+            </a:lvl1pPr>
+            <a:lvl2pPr>
+              <a:defRPr sz="2400"/>
+            </a:lvl2pPr>
+            <a:lvl3pPr>
+              <a:defRPr sz="2000"/>
+            </a:lvl3pPr>
+            <a:lvl4pPr>
+              <a:defRPr sz="1800"/>
+            </a:lvl4pPr>
+            <a:lvl5pPr>
+              <a:defRPr sz="1800"/>
+            </a:lvl5pPr>
+            <a:lvl6pPr>
+              <a:defRPr sz="1800"/>
+            </a:lvl6pPr>
+            <a:lvl7pPr>
+              <a:defRPr sz="1800"/>
+            </a:lvl7pPr>
+            <a:lvl8pPr>
+              <a:defRPr sz="1800"/>
+            </a:lvl8pPr>
+            <a:lvl9pPr>
+              <a:defRPr sz="1800"/>
+            </a:lvl9pPr>
+          </a:lstStyle>
+          <a:p>
+            <a:pPr lvl="0"/>
+            <a:r>
+              <a:rPr lang="en-US" smtClean="0"/>
+              <a:t>Click to edit Master text styles</a:t>
+            </a:r>
+          </a:p>
+          <a:p>
+            <a:pPr lvl="1"/>
+            <a:r>
+              <a:rPr lang="en-US" smtClean="0"/>
+              <a:t>Second level</a:t>
+            </a:r>
+          </a:p>
+          <a:p>
+            <a:pPr lvl="2"/>
+            <a:r>
+              <a:rPr lang="en-US" smtClean="0"/>
+              <a:t>Third level</a:t>
+            </a:r>
+          </a:p>
+          <a:p>
+            <a:pPr lvl="3"/>
+            <a:r>
+              <a:rPr lang="en-US" smtClean="0"/>
+              <a:t>Fourth level</a:t>
+            </a:r>
+          </a:p>
+          <a:p>
+            <a:pPr lvl="4"/>
+            <a:r>
+              <a:rPr lang="en-US" smtClean="0"/>
+              <a:t>Fifth level</a:t>
+            </a:r>
+            <a:endParaRPr lang="en-US"/>
+          </a:p>
+        </p:txBody>
+      </p:sp>
+      <p:sp>
+        <p:nvSpPr>
+          <p:cNvPr id="5" name="Date Placeholder 4"/>
+          <p:cNvSpPr>
+            <a:spLocks noGrp="1"/>
+          </p:cNvSpPr>
+          <p:nvPr>
+            <p:ph type="dt" sz="half" idx="10"/>
+          </p:nvPr>
+        </p:nvSpPr>
+        <p:spPr/>
+        <p:txBody>
+          <a:bodyPr/>
+          <a:lstStyle/>
+          <a:p>
+            <a:fld id="{5BCAD085-E8A6-8845-BD4E-CB4CCA059FC4}" type="datetimeFigureOut">
+              <a:rPr lang="en-US" smtClean="0"/>
+              <a:t>1/27/13</a:t>
+            </a:fld>
+            <a:endParaRPr lang="en-US"/>
+          </a:p>
+        </p:txBody>
+      </p:sp>
+      <p:sp>
+        <p:nvSpPr>
+          <p:cNvPr id="6" name="Footer Placeholder 5"/>
+          <p:cNvSpPr>
+            <a:spLocks noGrp="1"/>
+          </p:cNvSpPr>
+          <p:nvPr>
+            <p:ph type="ftr" sz="quarter" idx="11"/>
+          </p:nvPr>
+        </p:nvSpPr>
+        <p:spPr/>
+        <p:txBody>
+          <a:bodyPr/>
+          <a:lstStyle/>
+          <a:p>
+            <a:endParaRPr lang="en-US"/>
+          </a:p>
+        </p:txBody>
+      </p:sp>
+      <p:sp>
+        <p:nvSpPr>
+          <p:cNvPr id="7" name="Slide Number Placeholder 6"/>
+          <p:cNvSpPr>
+            <a:spLocks noGrp="1"/>
+          </p:cNvSpPr>
+          <p:nvPr>
+            <p:ph type="sldNum" sz="quarter" idx="12"/>
+          </p:nvPr>
+        </p:nvSpPr>
+        <p:spPr/>
+        <p:txBody>
+          <a:bodyPr/>
+          <a:lstStyle/>
+          <a:p>
+            <a:fld id="{C1FF6DA9-008F-8B48-92A6-B652298478BF}" type="slidenum">
+              <a:rPr lang="en-US" smtClean="0"/>
+              <a:t>‹#›</a:t>
+            </a:fld>
+            <a:endParaRPr lang="en-US"/>
+          </a:p>
+        </p:txBody>
+      </p:sp>
+    </p:spTree>
+    <p:extLst>
+      <p:ext uri="{BB962C8B-B14F-4D97-AF65-F5344CB8AC3E}">
+        <p14:creationId xmlns:p14="http://schemas.microsoft.com/office/powerpoint/2010/main" val="2782244947"/>
+      </p:ext>
+    </p:extLst>
+  </p:cSld>
+  <p:clrMapOvr>
+    <a:masterClrMapping/>
+  </p:clrMapOvr>
+</p:sldLayout>
+</file>
+
+<file path=ppt/slideLayouts/slideLayout5.xml><?xml version="1.0" encoding="utf-8"?>
+<p:sldLayout xmlns:a="http://schemas.openxmlformats.org/drawingml/2006/main" xmlns:r="http://schemas.openxmlformats.org/officeDocument/2006/relationships" xmlns:p="http://schemas.openxmlformats.org/presentationml/2006/main" type="twoTxTwoObj" preserve="1">
+  <p:cSld name="Comparison">
+    <p:spTree>
+      <p:nvGrpSpPr>
+        <p:cNvPr id="1" name=""/>
+        <p:cNvGrpSpPr/>
+        <p:nvPr/>
+      </p:nvGrpSpPr>
+      <p:grpSpPr>
+        <a:xfrm>
+          <a:off x="0" y="0"/>
+          <a:ext cx="0" cy="0"/>
+          <a:chOff x="0" y="0"/>
+          <a:chExt cx="0" cy="0"/>
+        </a:xfrm>
+      </p:grpSpPr>
+      <p:sp>
+        <p:nvSpPr>
+          <p:cNvPr id="2" name="Title 1"/>
+          <p:cNvSpPr>
+            <a:spLocks noGrp="1"/>
+          </p:cNvSpPr>
+          <p:nvPr>
+            <p:ph type="title"/>
+          </p:nvPr>
+        </p:nvSpPr>
+        <p:spPr/>
+        <p:txBody>
+          <a:bodyPr/>
+          <a:lstStyle>
+            <a:lvl1pPr>
+              <a:defRPr/>
+            </a:lvl1pPr>
+          </a:lstStyle>
+          <a:p>
+            <a:r>
+              <a:rPr lang="en-US" smtClean="0"/>
+              <a:t>Click to edit Master title style</a:t>
+            </a:r>
+            <a:endParaRPr lang="en-US"/>
+          </a:p>
+        </p:txBody>
+      </p:sp>
+      <p:sp>
+        <p:nvSpPr>
+          <p:cNvPr id="3" name="Text Placeholder 2"/>
+          <p:cNvSpPr>
+            <a:spLocks noGrp="1"/>
+          </p:cNvSpPr>
+          <p:nvPr>
+            <p:ph type="body" idx="1"/>
+          </p:nvPr>
+        </p:nvSpPr>
+        <p:spPr>
+          <a:xfrm>
+            <a:off x="457200" y="1535113"/>
+            <a:ext cx="4040188" cy="639762"/>
+          </a:xfrm>
+        </p:spPr>
+        <p:txBody>
+          <a:bodyPr anchor="b"/>
+          <a:lstStyle>
+            <a:lvl1pPr marL="0" indent="0">
+              <a:buNone/>
+              <a:defRPr sz="2400" b="1"/>
+            </a:lvl1pPr>
+            <a:lvl2pPr marL="457200" indent="0">
+              <a:buNone/>
+              <a:defRPr sz="2000" b="1"/>
+            </a:lvl2pPr>
+            <a:lvl3pPr marL="914400" indent="0">
+              <a:buNone/>
+              <a:defRPr sz="1800" b="1"/>
+            </a:lvl3pPr>
+            <a:lvl4pPr marL="1371600" indent="0">
+              <a:buNone/>
+              <a:defRPr sz="1600" b="1"/>
+            </a:lvl4pPr>
+            <a:lvl5pPr marL="1828800" indent="0">
+              <a:buNone/>
+              <a:defRPr sz="1600" b="1"/>
+            </a:lvl5pPr>
+            <a:lvl6pPr marL="2286000" indent="0">
+              <a:buNone/>
+              <a:defRPr sz="1600" b="1"/>
+            </a:lvl6pPr>
+            <a:lvl7pPr marL="2743200" indent="0">
+              <a:buNone/>
+              <a:defRPr sz="1600" b="1"/>
+            </a:lvl7pPr>
+            <a:lvl8pPr marL="3200400" indent="0">
+              <a:buNone/>
+              <a:defRPr sz="1600" b="1"/>
+            </a:lvl8pPr>
+            <a:lvl9pPr marL="3657600" indent="0">
+              <a:buNone/>
+              <a:defRPr sz="1600" b="1"/>
+            </a:lvl9pPr>
+          </a:lstStyle>
+          <a:p>
+            <a:pPr lvl="0"/>
+            <a:r>
+              <a:rPr lang="en-US" smtClean="0"/>
+              <a:t>Click to edit Master text styles</a:t>
+            </a:r>
+          </a:p>
+        </p:txBody>
+      </p:sp>
+      <p:sp>
+        <p:nvSpPr>
+          <p:cNvPr id="4" name="Content Placeholder 3"/>
+          <p:cNvSpPr>
+            <a:spLocks noGrp="1"/>
+          </p:cNvSpPr>
+          <p:nvPr>
+            <p:ph sz="half" idx="2"/>
+          </p:nvPr>
+        </p:nvSpPr>
+        <p:spPr>
+          <a:xfrm>
+            <a:off x="457200" y="2174875"/>
+            <a:ext cx="4040188" cy="3951288"/>
+          </a:xfrm>
+        </p:spPr>
+        <p:txBody>
+          <a:bodyPr/>
+          <a:lstStyle>
+            <a:lvl1pPr>
+              <a:defRPr sz="2400"/>
+            </a:lvl1pPr>
+            <a:lvl2pPr>
+              <a:defRPr sz="2000"/>
+            </a:lvl2pPr>
+            <a:lvl3pPr>
+              <a:defRPr sz="1800"/>
+            </a:lvl3pPr>
+            <a:lvl4pPr>
+              <a:defRPr sz="1600"/>
+            </a:lvl4pPr>
+            <a:lvl5pPr>
+              <a:defRPr sz="1600"/>
+            </a:lvl5pPr>
+            <a:lvl6pPr>
+              <a:defRPr sz="1600"/>
+            </a:lvl6pPr>
+            <a:lvl7pPr>
+              <a:defRPr sz="1600"/>
+            </a:lvl7pPr>
+            <a:lvl8pPr>
+              <a:defRPr sz="1600"/>
+            </a:lvl8pPr>
+            <a:lvl9pPr>
+              <a:defRPr sz="1600"/>
+            </a:lvl9pPr>
+          </a:lstStyle>
+          <a:p>
+            <a:pPr lvl="0"/>
+            <a:r>
+              <a:rPr lang="en-US" smtClean="0"/>
+              <a:t>Click to edit Master text styles</a:t>
+            </a:r>
+          </a:p>
+          <a:p>
+            <a:pPr lvl="1"/>
+            <a:r>
+              <a:rPr lang="en-US" smtClean="0"/>
+              <a:t>Second level</a:t>
+            </a:r>
+          </a:p>
+          <a:p>
+            <a:pPr lvl="2"/>
+            <a:r>
+              <a:rPr lang="en-US" smtClean="0"/>
+              <a:t>Third level</a:t>
+            </a:r>
+          </a:p>
+          <a:p>
+            <a:pPr lvl="3"/>
+            <a:r>
+              <a:rPr lang="en-US" smtClean="0"/>
+              <a:t>Fourth level</a:t>
+            </a:r>
+          </a:p>
+          <a:p>
+            <a:pPr lvl="4"/>
+            <a:r>
+              <a:rPr lang="en-US" smtClean="0"/>
+              <a:t>Fifth level</a:t>
+            </a:r>
+            <a:endParaRPr lang="en-US"/>
+          </a:p>
+        </p:txBody>
+      </p:sp>
+      <p:sp>
+        <p:nvSpPr>
+          <p:cNvPr id="5" name="Text Placeholder 4"/>
+          <p:cNvSpPr>
+            <a:spLocks noGrp="1"/>
+          </p:cNvSpPr>
+          <p:nvPr>
+            <p:ph type="body" sz="quarter" idx="3"/>
+          </p:nvPr>
+        </p:nvSpPr>
+        <p:spPr>
+          <a:xfrm>
+            <a:off x="4645025" y="1535113"/>
+            <a:ext cx="4041775" cy="639762"/>
+          </a:xfrm>
+        </p:spPr>
+        <p:txBody>
+          <a:bodyPr anchor="b"/>
+          <a:lstStyle>
+            <a:lvl1pPr marL="0" indent="0">
+              <a:buNone/>
+              <a:defRPr sz="2400" b="1"/>
+            </a:lvl1pPr>
+            <a:lvl2pPr marL="457200" indent="0">
+              <a:buNone/>
+              <a:defRPr sz="2000" b="1"/>
+            </a:lvl2pPr>
+            <a:lvl3pPr marL="914400" indent="0">
+              <a:buNone/>
+              <a:defRPr sz="1800" b="1"/>
+            </a:lvl3pPr>
+            <a:lvl4pPr marL="1371600" indent="0">
+              <a:buNone/>
+              <a:defRPr sz="1600" b="1"/>
+            </a:lvl4pPr>
+            <a:lvl5pPr marL="1828800" indent="0">
+              <a:buNone/>
+              <a:defRPr sz="1600" b="1"/>
+            </a:lvl5pPr>
+            <a:lvl6pPr marL="2286000" indent="0">
+              <a:buNone/>
+              <a:defRPr sz="1600" b="1"/>
+            </a:lvl6pPr>
+            <a:lvl7pPr marL="2743200" indent="0">
+              <a:buNone/>
+              <a:defRPr sz="1600" b="1"/>
+            </a:lvl7pPr>
+            <a:lvl8pPr marL="3200400" indent="0">
+              <a:buNone/>
+              <a:defRPr sz="1600" b="1"/>
+            </a:lvl8pPr>
+            <a:lvl9pPr marL="3657600" indent="0">
+              <a:buNone/>
+              <a:defRPr sz="1600" b="1"/>
+            </a:lvl9pPr>
+          </a:lstStyle>
+          <a:p>
+            <a:pPr lvl="0"/>
+            <a:r>
+              <a:rPr lang="en-US" smtClean="0"/>
+              <a:t>Click to edit Master text styles</a:t>
+            </a:r>
+          </a:p>
+        </p:txBody>
+      </p:sp>
+      <p:sp>
+        <p:nvSpPr>
+          <p:cNvPr id="6" name="Content Placeholder 5"/>
+          <p:cNvSpPr>
+            <a:spLocks noGrp="1"/>
+          </p:cNvSpPr>
+          <p:nvPr>
+            <p:ph sz="quarter" idx="4"/>
+          </p:nvPr>
+        </p:nvSpPr>
+        <p:spPr>
+          <a:xfrm>
+            <a:off x="4645025" y="2174875"/>
+            <a:ext cx="4041775" cy="3951288"/>
+          </a:xfrm>
+        </p:spPr>
+        <p:txBody>
+          <a:bodyPr/>
+          <a:lstStyle>
+            <a:lvl1pPr>
+              <a:defRPr sz="2400"/>
+            </a:lvl1pPr>
+            <a:lvl2pPr>
+              <a:defRPr sz="2000"/>
+            </a:lvl2pPr>
+            <a:lvl3pPr>
+              <a:defRPr sz="1800"/>
+            </a:lvl3pPr>
+            <a:lvl4pPr>
+              <a:defRPr sz="1600"/>
+            </a:lvl4pPr>
+            <a:lvl5pPr>
+              <a:defRPr sz="1600"/>
+            </a:lvl5pPr>
+            <a:lvl6pPr>
+              <a:defRPr sz="1600"/>
+            </a:lvl6pPr>
+            <a:lvl7pPr>
+              <a:defRPr sz="1600"/>
+            </a:lvl7pPr>
+            <a:lvl8pPr>
+              <a:defRPr sz="1600"/>
+            </a:lvl8pPr>
+            <a:lvl9pPr>
+              <a:defRPr sz="1600"/>
+            </a:lvl9pPr>
+          </a:lstStyle>
+          <a:p>
+            <a:pPr lvl="0"/>
+            <a:r>
+              <a:rPr lang="en-US" smtClean="0"/>
+              <a:t>Click to edit Master text styles</a:t>
+            </a:r>
+          </a:p>
+          <a:p>
+            <a:pPr lvl="1"/>
+            <a:r>
+              <a:rPr lang="en-US" smtClean="0"/>
+              <a:t>Second level</a:t>
+            </a:r>
+          </a:p>
+          <a:p>
+            <a:pPr lvl="2"/>
+            <a:r>
+              <a:rPr lang="en-US" smtClean="0"/>
+              <a:t>Third level</a:t>
+            </a:r>
+          </a:p>
+          <a:p>
+            <a:pPr lvl="3"/>
+            <a:r>
+              <a:rPr lang="en-US" smtClean="0"/>
+              <a:t>Fourth level</a:t>
+            </a:r>
+          </a:p>
+          <a:p>
+            <a:pPr lvl="4"/>
+            <a:r>
+              <a:rPr lang="en-US" smtClean="0"/>
+              <a:t>Fifth level</a:t>
+            </a:r>
+            <a:endParaRPr lang="en-US"/>
+          </a:p>
+        </p:txBody>
+      </p:sp>
+      <p:sp>
+        <p:nvSpPr>
+          <p:cNvPr id="7" name="Date Placeholder 6"/>
+          <p:cNvSpPr>
+            <a:spLocks noGrp="1"/>
+          </p:cNvSpPr>
+          <p:nvPr>
+            <p:ph type="dt" sz="half" idx="10"/>
+          </p:nvPr>
+        </p:nvSpPr>
+        <p:spPr/>
+        <p:txBody>
+          <a:bodyPr/>
+          <a:lstStyle/>
+          <a:p>
+            <a:fld id="{5BCAD085-E8A6-8845-BD4E-CB4CCA059FC4}" type="datetimeFigureOut">
+              <a:rPr lang="en-US" smtClean="0"/>
+              <a:t>1/27/13</a:t>
+            </a:fld>
+            <a:endParaRPr lang="en-US"/>
+          </a:p>
+        </p:txBody>
+      </p:sp>
+      <p:sp>
+        <p:nvSpPr>
+          <p:cNvPr id="8" name="Footer Placeholder 7"/>
+          <p:cNvSpPr>
+            <a:spLocks noGrp="1"/>
+          </p:cNvSpPr>
+          <p:nvPr>
+            <p:ph type="ftr" sz="quarter" idx="11"/>
+          </p:nvPr>
+        </p:nvSpPr>
+        <p:spPr/>
+        <p:txBody>
+          <a:bodyPr/>
+          <a:lstStyle/>
+          <a:p>
+            <a:endParaRPr lang="en-US"/>
+          </a:p>
+        </p:txBody>
+      </p:sp>
+      <p:sp>
+        <p:nvSpPr>
+          <p:cNvPr id="9" name="Slide Number Placeholder 8"/>
+          <p:cNvSpPr>
+            <a:spLocks noGrp="1"/>
+          </p:cNvSpPr>
+          <p:nvPr>
+            <p:ph type="sldNum" sz="quarter" idx="12"/>
+          </p:nvPr>
+        </p:nvSpPr>
+        <p:spPr/>
+        <p:txBody>
+          <a:bodyPr/>
+          <a:lstStyle/>
+          <a:p>
+            <a:fld id="{C1FF6DA9-008F-8B48-92A6-B652298478BF}" type="slidenum">
+              <a:rPr lang="en-US" smtClean="0"/>
+              <a:t>‹#›</a:t>
+            </a:fld>
+            <a:endParaRPr lang="en-US"/>
+          </a:p>
+        </p:txBody>
+      </p:sp>
+    </p:spTree>
+    <p:extLst>
+      <p:ext uri="{BB962C8B-B14F-4D97-AF65-F5344CB8AC3E}">
+        <p14:creationId xmlns:p14="http://schemas.microsoft.com/office/powerpoint/2010/main" val="990158736"/>
+      </p:ext>
+    </p:extLst>
+  </p:cSld>
+  <p:clrMapOvr>
+    <a:masterClrMapping/>
+  </p:clrMapOvr>
+</p:sldLayout>
+</file>
+
+<file path=ppt/slideLayouts/slideLayout6.xml><?xml version="1.0" encoding="utf-8"?>
+<p:sldLayout xmlns:a="http://schemas.openxmlformats.org/drawingml/2006/main" xmlns:r="http://schemas.openxmlformats.org/officeDocument/2006/relationships" xmlns:p="http://schemas.openxmlformats.org/presentationml/2006/main" type="titleOnly" preserve="1">
+  <p:cSld name="Title Only">
+    <p:spTree>
+      <p:nvGrpSpPr>
+        <p:cNvPr id="1" name=""/>
+        <p:cNvGrpSpPr/>
+        <p:nvPr/>
+      </p:nvGrpSpPr>
+      <p:grpSpPr>
+        <a:xfrm>
+          <a:off x="0" y="0"/>
+          <a:ext cx="0" cy="0"/>
+          <a:chOff x="0" y="0"/>
+          <a:chExt cx="0" cy="0"/>
+        </a:xfrm>
+      </p:grpSpPr>
+      <p:sp>
+        <p:nvSpPr>
+          <p:cNvPr id="2" name="Title 1"/>
+          <p:cNvSpPr>
+            <a:spLocks noGrp="1"/>
+          </p:cNvSpPr>
+          <p:nvPr>
+            <p:ph type="title"/>
+          </p:nvPr>
+        </p:nvSpPr>
+        <p:spPr/>
+        <p:txBody>
+          <a:bodyPr/>
+          <a:lstStyle/>
+          <a:p>
+            <a:r>
+              <a:rPr lang="en-US" smtClean="0"/>
+              <a:t>Click to edit Master title style</a:t>
+            </a:r>
+            <a:endParaRPr lang="en-US"/>
+          </a:p>
+        </p:txBody>
+      </p:sp>
+      <p:sp>
+        <p:nvSpPr>
+          <p:cNvPr id="3" name="Date Placeholder 2"/>
+          <p:cNvSpPr>
+            <a:spLocks noGrp="1"/>
+          </p:cNvSpPr>
+          <p:nvPr>
+            <p:ph type="dt" sz="half" idx="10"/>
+          </p:nvPr>
+        </p:nvSpPr>
+        <p:spPr/>
+        <p:txBody>
+          <a:bodyPr/>
+          <a:lstStyle/>
+          <a:p>
+            <a:fld id="{5BCAD085-E8A6-8845-BD4E-CB4CCA059FC4}" type="datetimeFigureOut">
+              <a:rPr lang="en-US" smtClean="0"/>
+              <a:t>1/27/13</a:t>
+            </a:fld>
+            <a:endParaRPr lang="en-US"/>
+          </a:p>
+        </p:txBody>
+      </p:sp>
+      <p:sp>
+        <p:nvSpPr>
+          <p:cNvPr id="4" name="Footer Placeholder 3"/>
+          <p:cNvSpPr>
+            <a:spLocks noGrp="1"/>
+          </p:cNvSpPr>
+          <p:nvPr>
+            <p:ph type="ftr" sz="quarter" idx="11"/>
+          </p:nvPr>
+        </p:nvSpPr>
+        <p:spPr/>
+        <p:txBody>
+          <a:bodyPr/>
+          <a:lstStyle/>
+          <a:p>
+            <a:endParaRPr lang="en-US"/>
+          </a:p>
+        </p:txBody>
+      </p:sp>
+      <p:sp>
+        <p:nvSpPr>
+          <p:cNvPr id="5" name="Slide Number Placeholder 4"/>
+          <p:cNvSpPr>
+            <a:spLocks noGrp="1"/>
+          </p:cNvSpPr>
+          <p:nvPr>
+            <p:ph type="sldNum" sz="quarter" idx="12"/>
+          </p:nvPr>
+        </p:nvSpPr>
+        <p:spPr/>
+        <p:txBody>
+          <a:bodyPr/>
+          <a:lstStyle/>
+          <a:p>
+            <a:fld id="{C1FF6DA9-008F-8B48-92A6-B652298478BF}" type="slidenum">
+              <a:rPr lang="en-US" smtClean="0"/>
+              <a:t>‹#›</a:t>
+            </a:fld>
+            <a:endParaRPr lang="en-US"/>
+          </a:p>
+        </p:txBody>
+      </p:sp>
+    </p:spTree>
+    <p:extLst>
+      <p:ext uri="{BB962C8B-B14F-4D97-AF65-F5344CB8AC3E}">
+        <p14:creationId xmlns:p14="http://schemas.microsoft.com/office/powerpoint/2010/main" val="727027711"/>
+      </p:ext>
+    </p:extLst>
+  </p:cSld>
+  <p:clrMapOvr>
+    <a:masterClrMapping/>
+  </p:clrMapOvr>
+</p:sldLayout>
+</file>
+
+<file path=ppt/slideLayouts/slideLayout7.xml><?xml version="1.0" encoding="utf-8"?>
+<p:sldLayout xmlns:a="http://schemas.openxmlformats.org/drawingml/2006/main" xmlns:r="http://schemas.openxmlformats.org/officeDocument/2006/relationships" xmlns:p="http://schemas.openxmlformats.org/presentationml/2006/main" type="blank" preserve="1">
+  <p:cSld name="Blank">
+    <p:spTree>
+      <p:nvGrpSpPr>
+        <p:cNvPr id="1" name=""/>
+        <p:cNvGrpSpPr/>
+        <p:nvPr/>
+      </p:nvGrpSpPr>
+      <p:grpSpPr>
+        <a:xfrm>
+          <a:off x="0" y="0"/>
+          <a:ext cx="0" cy="0"/>
+          <a:chOff x="0" y="0"/>
+          <a:chExt cx="0" cy="0"/>
+        </a:xfrm>
+      </p:grpSpPr>
+      <p:sp>
+        <p:nvSpPr>
+          <p:cNvPr id="2" name="Date Placeholder 1"/>
+          <p:cNvSpPr>
+            <a:spLocks noGrp="1"/>
+          </p:cNvSpPr>
+          <p:nvPr>
+            <p:ph type="dt" sz="half" idx="10"/>
+          </p:nvPr>
+        </p:nvSpPr>
+        <p:spPr/>
+        <p:txBody>
+          <a:bodyPr/>
+          <a:lstStyle/>
+          <a:p>
+            <a:fld id="{5BCAD085-E8A6-8845-BD4E-CB4CCA059FC4}" type="datetimeFigureOut">
+              <a:rPr lang="en-US" smtClean="0"/>
+              <a:t>1/27/13</a:t>
+            </a:fld>
+            <a:endParaRPr lang="en-US"/>
+          </a:p>
+        </p:txBody>
+      </p:sp>
+      <p:sp>
+        <p:nvSpPr>
+          <p:cNvPr id="3" name="Footer Placeholder 2"/>
+          <p:cNvSpPr>
+            <a:spLocks noGrp="1"/>
+          </p:cNvSpPr>
+          <p:nvPr>
+            <p:ph type="ftr" sz="quarter" idx="11"/>
+          </p:nvPr>
+        </p:nvSpPr>
+        <p:spPr/>
+        <p:txBody>
+          <a:bodyPr/>
+          <a:lstStyle/>
+          <a:p>
+            <a:endParaRPr lang="en-US"/>
+          </a:p>
+        </p:txBody>
+      </p:sp>
+      <p:sp>
+        <p:nvSpPr>
+          <p:cNvPr id="4" name="Slide Number Placeholder 3"/>
+          <p:cNvSpPr>
+            <a:spLocks noGrp="1"/>
+          </p:cNvSpPr>
+          <p:nvPr>
+            <p:ph type="sldNum" sz="quarter" idx="12"/>
+          </p:nvPr>
+        </p:nvSpPr>
+        <p:spPr/>
+        <p:txBody>
+          <a:bodyPr/>
+          <a:lstStyle/>
+          <a:p>
+            <a:fld id="{C1FF6DA9-008F-8B48-92A6-B652298478BF}" type="slidenum">
+              <a:rPr lang="en-US" smtClean="0"/>
+              <a:t>‹#›</a:t>
+            </a:fld>
+            <a:endParaRPr lang="en-US"/>
+          </a:p>
+        </p:txBody>
+      </p:sp>
+    </p:spTree>
+    <p:extLst>
+      <p:ext uri="{BB962C8B-B14F-4D97-AF65-F5344CB8AC3E}">
+        <p14:creationId xmlns:p14="http://schemas.microsoft.com/office/powerpoint/2010/main" val="1212999818"/>
+      </p:ext>
+    </p:extLst>
+  </p:cSld>
+  <p:clrMapOvr>
+    <a:masterClrMapping/>
+  </p:clrMapOvr>
+</p:sldLayout>
+</file>
+
+<file path=ppt/slideLayouts/slideLayout8.xml><?xml version="1.0" encoding="utf-8"?>
+<p:sldLayout xmlns:a="http://schemas.openxmlformats.org/drawingml/2006/main" xmlns:r="http://schemas.openxmlformats.org/officeDocument/2006/relationships" xmlns:p="http://schemas.openxmlformats.org/presentationml/2006/main" type="objTx" preserve="1">
+  <p:cSld name="Content with Caption">
+    <p:spTree>
+      <p:nvGrpSpPr>
+        <p:cNvPr id="1" name=""/>
+        <p:cNvGrpSpPr/>
+        <p:nvPr/>
+      </p:nvGrpSpPr>
+      <p:grpSpPr>
+        <a:xfrm>
+          <a:off x="0" y="0"/>
+          <a:ext cx="0" cy="0"/>
+          <a:chOff x="0" y="0"/>
+          <a:chExt cx="0" cy="0"/>
+        </a:xfrm>
+      </p:grpSpPr>
+      <p:sp>
+        <p:nvSpPr>
+          <p:cNvPr id="2" name="Title 1"/>
+          <p:cNvSpPr>
+            <a:spLocks noGrp="1"/>
+          </p:cNvSpPr>
+          <p:nvPr>
+            <p:ph type="title"/>
+          </p:nvPr>
+        </p:nvSpPr>
+        <p:spPr>
+          <a:xfrm>
+            <a:off x="457200" y="273050"/>
+            <a:ext cx="3008313" cy="1162050"/>
+          </a:xfrm>
+        </p:spPr>
+        <p:txBody>
+          <a:bodyPr anchor="b"/>
+          <a:lstStyle>
+            <a:lvl1pPr algn="l">
+              <a:defRPr sz="2000" b="1"/>
+            </a:lvl1pPr>
+          </a:lstStyle>
+          <a:p>
+            <a:r>
+              <a:rPr lang="en-US" smtClean="0"/>
+              <a:t>Click to edit Master title style</a:t>
+            </a:r>
+            <a:endParaRPr lang="en-US"/>
+          </a:p>
+        </p:txBody>
+      </p:sp>
+      <p:sp>
+        <p:nvSpPr>
+          <p:cNvPr id="3" name="Content Placeholder 2"/>
+          <p:cNvSpPr>
+            <a:spLocks noGrp="1"/>
+          </p:cNvSpPr>
+          <p:nvPr>
+            <p:ph idx="1"/>
+          </p:nvPr>
+        </p:nvSpPr>
+        <p:spPr>
+          <a:xfrm>
+            <a:off x="3575050" y="273050"/>
+            <a:ext cx="5111750" cy="5853113"/>
+          </a:xfrm>
+        </p:spPr>
+        <p:txBody>
+          <a:bodyPr/>
+          <a:lstStyle>
+            <a:lvl1pPr>
+              <a:defRPr sz="3200"/>
+            </a:lvl1pPr>
+            <a:lvl2pPr>
+              <a:defRPr sz="2800"/>
+            </a:lvl2pPr>
+            <a:lvl3pPr>
+              <a:defRPr sz="2400"/>
+            </a:lvl3pPr>
+            <a:lvl4pPr>
+              <a:defRPr sz="2000"/>
+            </a:lvl4pPr>
+            <a:lvl5pPr>
+              <a:defRPr sz="2000"/>
+            </a:lvl5pPr>
+            <a:lvl6pPr>
+              <a:defRPr sz="2000"/>
+            </a:lvl6pPr>
+            <a:lvl7pPr>
+              <a:defRPr sz="2000"/>
+            </a:lvl7pPr>
+            <a:lvl8pPr>
+              <a:defRPr sz="2000"/>
+            </a:lvl8pPr>
+            <a:lvl9pPr>
+              <a:defRPr sz="2000"/>
+            </a:lvl9pPr>
+          </a:lstStyle>
+          <a:p>
+            <a:pPr lvl="0"/>
+            <a:r>
+              <a:rPr lang="en-US" smtClean="0"/>
+              <a:t>Click to edit Master text styles</a:t>
+            </a:r>
+          </a:p>
+          <a:p>
+            <a:pPr lvl="1"/>
+            <a:r>
+              <a:rPr lang="en-US" smtClean="0"/>
+              <a:t>Second level</a:t>
+            </a:r>
+          </a:p>
+          <a:p>
+            <a:pPr lvl="2"/>
+            <a:r>
+              <a:rPr lang="en-US" smtClean="0"/>
+              <a:t>Third level</a:t>
+            </a:r>
+          </a:p>
+          <a:p>
+            <a:pPr lvl="3"/>
+            <a:r>
+              <a:rPr lang="en-US" smtClean="0"/>
+              <a:t>Fourth level</a:t>
+            </a:r>
+          </a:p>
+          <a:p>
+            <a:pPr lvl="4"/>
+            <a:r>
+              <a:rPr lang="en-US" smtClean="0"/>
+              <a:t>Fifth level</a:t>
+            </a:r>
+            <a:endParaRPr lang="en-US"/>
+          </a:p>
+        </p:txBody>
+      </p:sp>
+      <p:sp>
+        <p:nvSpPr>
+          <p:cNvPr id="4" name="Text Placeholder 3"/>
+          <p:cNvSpPr>
+            <a:spLocks noGrp="1"/>
+          </p:cNvSpPr>
+          <p:nvPr>
+            <p:ph type="body" sz="half" idx="2"/>
+          </p:nvPr>
+        </p:nvSpPr>
+        <p:spPr>
+          <a:xfrm>
+            <a:off x="457200" y="1435100"/>
+            <a:ext cx="3008313" cy="4691063"/>
+          </a:xfrm>
+        </p:spPr>
+        <p:txBody>
+          <a:bodyPr/>
+          <a:lstStyle>
+            <a:lvl1pPr marL="0" indent="0">
+              <a:buNone/>
+              <a:defRPr sz="1400"/>
+            </a:lvl1pPr>
+            <a:lvl2pPr marL="457200" indent="0">
+              <a:buNone/>
+              <a:defRPr sz="1200"/>
+            </a:lvl2pPr>
+            <a:lvl3pPr marL="914400" indent="0">
+              <a:buNone/>
+              <a:defRPr sz="1000"/>
+            </a:lvl3pPr>
+            <a:lvl4pPr marL="1371600" indent="0">
+              <a:buNone/>
+              <a:defRPr sz="900"/>
+            </a:lvl4pPr>
+            <a:lvl5pPr marL="1828800" indent="0">
+              <a:buNone/>
+              <a:defRPr sz="900"/>
+            </a:lvl5pPr>
+            <a:lvl6pPr marL="2286000" indent="0">
+              <a:buNone/>
+              <a:defRPr sz="900"/>
+            </a:lvl6pPr>
+            <a:lvl7pPr marL="2743200" indent="0">
+              <a:buNone/>
+              <a:defRPr sz="900"/>
+            </a:lvl7pPr>
+            <a:lvl8pPr marL="3200400" indent="0">
+              <a:buNone/>
+              <a:defRPr sz="900"/>
+            </a:lvl8pPr>
+            <a:lvl9pPr marL="3657600" indent="0">
+              <a:buNone/>
+              <a:defRPr sz="900"/>
+            </a:lvl9pPr>
+          </a:lstStyle>
+          <a:p>
+            <a:pPr lvl="0"/>
+            <a:r>
+              <a:rPr lang="en-US" smtClean="0"/>
+              <a:t>Click to edit Master text styles</a:t>
+            </a:r>
+          </a:p>
+        </p:txBody>
+      </p:sp>
+      <p:sp>
+        <p:nvSpPr>
+          <p:cNvPr id="5" name="Date Placeholder 4"/>
+          <p:cNvSpPr>
+            <a:spLocks noGrp="1"/>
+          </p:cNvSpPr>
+          <p:nvPr>
+            <p:ph type="dt" sz="half" idx="10"/>
+          </p:nvPr>
+        </p:nvSpPr>
+        <p:spPr/>
+        <p:txBody>
+          <a:bodyPr/>
+          <a:lstStyle/>
+          <a:p>
+            <a:fld id="{5BCAD085-E8A6-8845-BD4E-CB4CCA059FC4}" type="datetimeFigureOut">
+              <a:rPr lang="en-US" smtClean="0"/>
+              <a:t>1/27/13</a:t>
+            </a:fld>
+            <a:endParaRPr lang="en-US"/>
+          </a:p>
+        </p:txBody>
+      </p:sp>
+      <p:sp>
+        <p:nvSpPr>
+          <p:cNvPr id="6" name="Footer Placeholder 5"/>
+          <p:cNvSpPr>
+            <a:spLocks noGrp="1"/>
+          </p:cNvSpPr>
+          <p:nvPr>
+            <p:ph type="ftr" sz="quarter" idx="11"/>
+          </p:nvPr>
+        </p:nvSpPr>
+        <p:spPr/>
+        <p:txBody>
+          <a:bodyPr/>
+          <a:lstStyle/>
+          <a:p>
+            <a:endParaRPr lang="en-US"/>
+          </a:p>
+        </p:txBody>
+      </p:sp>
+      <p:sp>
+        <p:nvSpPr>
+          <p:cNvPr id="7" name="Slide Number Placeholder 6"/>
+          <p:cNvSpPr>
+            <a:spLocks noGrp="1"/>
+          </p:cNvSpPr>
+          <p:nvPr>
+            <p:ph type="sldNum" sz="quarter" idx="12"/>
+          </p:nvPr>
+        </p:nvSpPr>
+        <p:spPr/>
+        <p:txBody>
+          <a:bodyPr/>
+          <a:lstStyle/>
+          <a:p>
+            <a:fld id="{C1FF6DA9-008F-8B48-92A6-B652298478BF}" type="slidenum">
+              <a:rPr lang="en-US" smtClean="0"/>
+              <a:t>‹#›</a:t>
+            </a:fld>
+            <a:endParaRPr lang="en-US"/>
+          </a:p>
+        </p:txBody>
+      </p:sp>
+    </p:spTree>
+    <p:extLst>
+      <p:ext uri="{BB962C8B-B14F-4D97-AF65-F5344CB8AC3E}">
+        <p14:creationId xmlns:p14="http://schemas.microsoft.com/office/powerpoint/2010/main" val="1840726560"/>
+      </p:ext>
+    </p:extLst>
+  </p:cSld>
+  <p:clrMapOvr>
+    <a:masterClrMapping/>
+  </p:clrMapOvr>
+</p:sldLayout>
+</file>
+
+<file path=ppt/slideLayouts/slideLayout9.xml><?xml version="1.0" encoding="utf-8"?>
+<p:sldLayout xmlns:a="http://schemas.openxmlformats.org/drawingml/2006/main" xmlns:r="http://schemas.openxmlformats.org/officeDocument/2006/relationships" xmlns:p="http://schemas.openxmlformats.org/presentationml/2006/main" type="picTx" preserve="1">
+  <p:cSld name="Picture with Caption">
+    <p:spTree>
+      <p:nvGrpSpPr>
+        <p:cNvPr id="1" name=""/>
+        <p:cNvGrpSpPr/>
+        <p:nvPr/>
+      </p:nvGrpSpPr>
+      <p:grpSpPr>
+        <a:xfrm>
+          <a:off x="0" y="0"/>
+          <a:ext cx="0" cy="0"/>
+          <a:chOff x="0" y="0"/>
+          <a:chExt cx="0" cy="0"/>
+        </a:xfrm>
+      </p:grpSpPr>
+      <p:sp>
+        <p:nvSpPr>
+          <p:cNvPr id="2" name="Title 1"/>
+          <p:cNvSpPr>
+            <a:spLocks noGrp="1"/>
+          </p:cNvSpPr>
+          <p:nvPr>
+            <p:ph type="title"/>
+          </p:nvPr>
+        </p:nvSpPr>
+        <p:spPr>
+          <a:xfrm>
+            <a:off x="1792288" y="4800600"/>
+            <a:ext cx="5486400" cy="566738"/>
+          </a:xfrm>
+        </p:spPr>
+        <p:txBody>
+          <a:bodyPr anchor="b"/>
+          <a:lstStyle>
+            <a:lvl1pPr algn="l">
+              <a:defRPr sz="2000" b="1"/>
+            </a:lvl1pPr>
+          </a:lstStyle>
+          <a:p>
+            <a:r>
+              <a:rPr lang="en-US" smtClean="0"/>
+              <a:t>Click to edit Master title style</a:t>
+            </a:r>
+            <a:endParaRPr lang="en-US"/>
+          </a:p>
+        </p:txBody>
+      </p:sp>
+      <p:sp>
+        <p:nvSpPr>
+          <p:cNvPr id="3" name="Picture Placeholder 2"/>
+          <p:cNvSpPr>
+            <a:spLocks noGrp="1"/>
+          </p:cNvSpPr>
+          <p:nvPr>
+            <p:ph type="pic" idx="1"/>
+          </p:nvPr>
+        </p:nvSpPr>
+        <p:spPr>
+          <a:xfrm>
+            <a:off x="1792288" y="612775"/>
+            <a:ext cx="5486400" cy="4114800"/>
+          </a:xfrm>
+        </p:spPr>
+        <p:txBody>
+          <a:bodyPr/>
+          <a:lstStyle>
+            <a:lvl1pPr marL="0" indent="0">
+              <a:buNone/>
+              <a:defRPr sz="3200"/>
+            </a:lvl1pPr>
+            <a:lvl2pPr marL="457200" indent="0">
+              <a:buNone/>
+              <a:defRPr sz="2800"/>
+            </a:lvl2pPr>
+            <a:lvl3pPr marL="914400" indent="0">
+              <a:buNone/>
+              <a:defRPr sz="2400"/>
+            </a:lvl3pPr>
+            <a:lvl4pPr marL="1371600" indent="0">
+              <a:buNone/>
+              <a:defRPr sz="2000"/>
+            </a:lvl4pPr>
+            <a:lvl5pPr marL="1828800" indent="0">
+              <a:buNone/>
+              <a:defRPr sz="2000"/>
+            </a:lvl5pPr>
+            <a:lvl6pPr marL="2286000" indent="0">
+              <a:buNone/>
+              <a:defRPr sz="2000"/>
+            </a:lvl6pPr>
+            <a:lvl7pPr marL="2743200" indent="0">
+              <a:buNone/>
+              <a:defRPr sz="2000"/>
+            </a:lvl7pPr>
+            <a:lvl8pPr marL="3200400" indent="0">
+              <a:buNone/>
+              <a:defRPr sz="2000"/>
+            </a:lvl8pPr>
+            <a:lvl9pPr marL="3657600" indent="0">
+              <a:buNone/>
+              <a:defRPr sz="2000"/>
+            </a:lvl9pPr>
+          </a:lstStyle>
+          <a:p>
+            <a:endParaRPr lang="en-US"/>
+          </a:p>
+        </p:txBody>
+      </p:sp>
+      <p:sp>
+        <p:nvSpPr>
+          <p:cNvPr id="4" name="Text Placeholder 3"/>
+          <p:cNvSpPr>
+            <a:spLocks noGrp="1"/>
+          </p:cNvSpPr>
+          <p:nvPr>
+            <p:ph type="body" sz="half" idx="2"/>
+          </p:nvPr>
+        </p:nvSpPr>
+        <p:spPr>
+          <a:xfrm>
+            <a:off x="1792288" y="5367338"/>
+            <a:ext cx="5486400" cy="804862"/>
+          </a:xfrm>
+        </p:spPr>
+        <p:txBody>
+          <a:bodyPr/>
+          <a:lstStyle>
+            <a:lvl1pPr marL="0" indent="0">
+              <a:buNone/>
+              <a:defRPr sz="1400"/>
+            </a:lvl1pPr>
+            <a:lvl2pPr marL="457200" indent="0">
+              <a:buNone/>
+              <a:defRPr sz="1200"/>
+            </a:lvl2pPr>
+            <a:lvl3pPr marL="914400" indent="0">
+              <a:buNone/>
+              <a:defRPr sz="1000"/>
+            </a:lvl3pPr>
+            <a:lvl4pPr marL="1371600" indent="0">
+              <a:buNone/>
+              <a:defRPr sz="900"/>
+            </a:lvl4pPr>
+            <a:lvl5pPr marL="1828800" indent="0">
+              <a:buNone/>
+              <a:defRPr sz="900"/>
+            </a:lvl5pPr>
+            <a:lvl6pPr marL="2286000" indent="0">
+              <a:buNone/>
+              <a:defRPr sz="900"/>
+            </a:lvl6pPr>
+            <a:lvl7pPr marL="2743200" indent="0">
+              <a:buNone/>
+              <a:defRPr sz="900"/>
+            </a:lvl7pPr>
+            <a:lvl8pPr marL="3200400" indent="0">
+              <a:buNone/>
+              <a:defRPr sz="900"/>
+            </a:lvl8pPr>
+            <a:lvl9pPr marL="3657600" indent="0">
+              <a:buNone/>
+              <a:defRPr sz="900"/>
+            </a:lvl9pPr>
+          </a:lstStyle>
+          <a:p>
+            <a:pPr lvl="0"/>
+            <a:r>
+              <a:rPr lang="en-US" smtClean="0"/>
+              <a:t>Click to edit Master text styles</a:t>
+            </a:r>
+          </a:p>
+        </p:txBody>
+      </p:sp>
+      <p:sp>
+        <p:nvSpPr>
+          <p:cNvPr id="5" name="Date Placeholder 4"/>
+          <p:cNvSpPr>
+            <a:spLocks noGrp="1"/>
+          </p:cNvSpPr>
+          <p:nvPr>
+            <p:ph type="dt" sz="half" idx="10"/>
+          </p:nvPr>
+        </p:nvSpPr>
+        <p:spPr/>
+        <p:txBody>
+          <a:bodyPr/>
+          <a:lstStyle/>
+          <a:p>
+            <a:fld id="{5BCAD085-E8A6-8845-BD4E-CB4CCA059FC4}" type="datetimeFigureOut">
+              <a:rPr lang="en-US" smtClean="0"/>
+              <a:t>1/27/13</a:t>
+            </a:fld>
+            <a:endParaRPr lang="en-US"/>
+          </a:p>
+        </p:txBody>
+      </p:sp>
+      <p:sp>
+        <p:nvSpPr>
+          <p:cNvPr id="6" name="Footer Placeholder 5"/>
+          <p:cNvSpPr>
+            <a:spLocks noGrp="1"/>
+          </p:cNvSpPr>
+          <p:nvPr>
+            <p:ph type="ftr" sz="quarter" idx="11"/>
+          </p:nvPr>
+        </p:nvSpPr>
+        <p:spPr/>
+        <p:txBody>
+          <a:bodyPr/>
+          <a:lstStyle/>
+          <a:p>
+            <a:endParaRPr lang="en-US"/>
+          </a:p>
+        </p:txBody>
+      </p:sp>
+      <p:sp>
+        <p:nvSpPr>
+          <p:cNvPr id="7" name="Slide Number Placeholder 6"/>
+          <p:cNvSpPr>
+            <a:spLocks noGrp="1"/>
+          </p:cNvSpPr>
+          <p:nvPr>
+            <p:ph type="sldNum" sz="quarter" idx="12"/>
+          </p:nvPr>
+        </p:nvSpPr>
+        <p:spPr/>
+        <p:txBody>
+          <a:bodyPr/>
+          <a:lstStyle/>
+          <a:p>
+            <a:fld id="{C1FF6DA9-008F-8B48-92A6-B652298478BF}" type="slidenum">
+              <a:rPr lang="en-US" smtClean="0"/>
+              <a:t>‹#›</a:t>
+            </a:fld>
+            <a:endParaRPr lang="en-US"/>
+          </a:p>
+        </p:txBody>
+      </p:sp>
+    </p:spTree>
+    <p:extLst>
+      <p:ext uri="{BB962C8B-B14F-4D97-AF65-F5344CB8AC3E}">
+        <p14:creationId xmlns:p14="http://schemas.microsoft.com/office/powerpoint/2010/main" val="3889236939"/>
+      </p:ext>
+    </p:extLst>
+  </p:cSld>
+  <p:clrMapOvr>
+    <a:masterClrMapping/>
+  </p:clrMapOvr>
+</p:sldLayout>
+</file>
+
+<file path=ppt/slideMasters/slideMaster1.xml><?xml version="1.0" encoding="utf-8"?>
+<p:sldMaster xmlns:a="http://schemas.openxmlformats.org/drawingml/2006/main" xmlns:r="http://schemas.openxmlformats.org/officeDocument/2006/relationships" xmlns:p="http://schemas.openxmlformats.org/presentationml/2006/main">
   <p:cSld>
     <p:bg>
       <p:bgRef idx="1001">
@@ -132,186 +2593,170 @@
       </p:grpSpPr>
       <p:sp>
         <p:nvSpPr>
-          <p:cNvPr id="2" name="Header Placeholder 1"/>
-          <p:cNvSpPr>
-            <a:spLocks noGrp="1"/>
-          </p:cNvSpPr>
-          <p:nvPr>
-            <p:ph type="hdr" sz="quarter"/>
+          <p:cNvPr id="2" name="Title Placeholder 1"/>
+          <p:cNvSpPr>
+            <a:spLocks noGrp="1"/>
+          </p:cNvSpPr>
+          <p:nvPr>
+            <p:ph type="title"/>
           </p:nvPr>
         </p:nvSpPr>
         <p:spPr>
           <a:xfrm>
-            <a:off x="0" y="0"/>
-            <a:ext cx="2971800" cy="458788"/>
+            <a:off x="457200" y="274638"/>
+            <a:ext cx="8229600" cy="1143000"/>
           </a:xfrm>
           <a:prstGeom prst="rect">
             <a:avLst/>
           </a:prstGeom>
         </p:spPr>
         <p:txBody>
-          <a:bodyPr vert="horz" lIns="91440" tIns="45720" rIns="91440" bIns="45720" rtlCol="0"/>
-          <a:lstStyle>
-            <a:lvl1pPr algn="l">
-              <a:defRPr sz="1200"/>
-            </a:lvl1pPr>
-          </a:lstStyle>
-          <a:p>
-            <a:endParaRPr lang="en-US"/>
-          </a:p>
-        </p:txBody>
-      </p:sp>
-      <p:sp>
-        <p:nvSpPr>
-          <p:cNvPr id="3" name="Date Placeholder 2"/>
-          <p:cNvSpPr>
-            <a:spLocks noGrp="1"/>
-          </p:cNvSpPr>
-          <p:nvPr>
-            <p:ph type="dt" idx="1"/>
+          <a:bodyPr vert="horz" lIns="91440" tIns="45720" rIns="91440" bIns="45720" rtlCol="0" anchor="ctr">
+            <a:normAutofit/>
+          </a:bodyPr>
+          <a:lstStyle/>
+          <a:p>
+            <a:r>
+              <a:rPr lang="en-US" smtClean="0"/>
+              <a:t>Click to edit Master title style</a:t>
+            </a:r>
+            <a:endParaRPr lang="en-US"/>
+          </a:p>
+        </p:txBody>
+      </p:sp>
+      <p:sp>
+        <p:nvSpPr>
+          <p:cNvPr id="3" name="Text Placeholder 2"/>
+          <p:cNvSpPr>
+            <a:spLocks noGrp="1"/>
+          </p:cNvSpPr>
+          <p:nvPr>
+            <p:ph type="body" idx="1"/>
           </p:nvPr>
         </p:nvSpPr>
         <p:spPr>
           <a:xfrm>
-            <a:off x="3884613" y="0"/>
-            <a:ext cx="2971800" cy="458788"/>
+            <a:off x="457200" y="1600200"/>
+            <a:ext cx="8229600" cy="4525963"/>
           </a:xfrm>
           <a:prstGeom prst="rect">
             <a:avLst/>
           </a:prstGeom>
         </p:spPr>
         <p:txBody>
-          <a:bodyPr vert="horz" lIns="91440" tIns="45720" rIns="91440" bIns="45720" rtlCol="0"/>
-          <a:lstStyle>
-            <a:lvl1pPr algn="r">
-              <a:defRPr sz="1200"/>
-            </a:lvl1pPr>
-          </a:lstStyle>
-          <a:p>
-            <a:fld id="{5282F153-3F37-0F45-9E97-73ACFA13230C}" type="datetimeFigureOut">
-              <a:rPr lang="en-US"/>
-              <a:t>7/23/19</a:t>
-            </a:fld>
-            <a:endParaRPr lang="en-US"/>
-          </a:p>
-        </p:txBody>
-      </p:sp>
-      <p:sp>
-        <p:nvSpPr>
-          <p:cNvPr id="4" name="Slide Image Placeholder 3"/>
-          <p:cNvSpPr>
-            <a:spLocks noGrp="1" noRot="1" noChangeAspect="1"/>
-          </p:cNvSpPr>
-          <p:nvPr>
-            <p:ph type="sldImg" idx="2"/>
+          <a:bodyPr vert="horz" lIns="91440" tIns="45720" rIns="91440" bIns="45720" rtlCol="0">
+            <a:normAutofit/>
+          </a:bodyPr>
+          <a:lstStyle/>
+          <a:p>
+            <a:pPr lvl="0"/>
+            <a:r>
+              <a:rPr lang="en-US" smtClean="0"/>
+              <a:t>Click to edit Master text styles</a:t>
+            </a:r>
+          </a:p>
+          <a:p>
+            <a:pPr lvl="1"/>
+            <a:r>
+              <a:rPr lang="en-US" smtClean="0"/>
+              <a:t>Second level</a:t>
+            </a:r>
+          </a:p>
+          <a:p>
+            <a:pPr lvl="2"/>
+            <a:r>
+              <a:rPr lang="en-US" smtClean="0"/>
+              <a:t>Third level</a:t>
+            </a:r>
+          </a:p>
+          <a:p>
+            <a:pPr lvl="3"/>
+            <a:r>
+              <a:rPr lang="en-US" smtClean="0"/>
+              <a:t>Fourth level</a:t>
+            </a:r>
+          </a:p>
+          <a:p>
+            <a:pPr lvl="4"/>
+            <a:r>
+              <a:rPr lang="en-US" smtClean="0"/>
+              <a:t>Fifth level</a:t>
+            </a:r>
+            <a:endParaRPr lang="en-US"/>
+          </a:p>
+        </p:txBody>
+      </p:sp>
+      <p:sp>
+        <p:nvSpPr>
+          <p:cNvPr id="4" name="Date Placeholder 3"/>
+          <p:cNvSpPr>
+            <a:spLocks noGrp="1"/>
+          </p:cNvSpPr>
+          <p:nvPr>
+            <p:ph type="dt" sz="half" idx="2"/>
           </p:nvPr>
         </p:nvSpPr>
         <p:spPr>
           <a:xfrm>
-            <a:off x="685800" y="1143000"/>
-            <a:ext cx="5486400" cy="3086100"/>
-          </a:xfrm>
-          <a:prstGeom prst="rect">
-            <a:avLst/>
-          </a:prstGeom>
-          <a:noFill/>
-          <a:ln w="12700">
-            <a:solidFill>
-              <a:prstClr val="black"/>
-            </a:solidFill>
-          </a:ln>
-        </p:spPr>
-        <p:txBody>
-          <a:bodyPr vert="horz" lIns="91440" tIns="45720" rIns="91440" bIns="45720" rtlCol="0" anchor="ctr"/>
-          <a:lstStyle/>
-          <a:p>
-            <a:endParaRPr lang="en-US"/>
-          </a:p>
-        </p:txBody>
-      </p:sp>
-      <p:sp>
-        <p:nvSpPr>
-          <p:cNvPr id="5" name="Notes Placeholder 4"/>
-          <p:cNvSpPr>
-            <a:spLocks noGrp="1"/>
-          </p:cNvSpPr>
-          <p:nvPr>
-            <p:ph type="body" sz="quarter" idx="3"/>
-          </p:nvPr>
-        </p:nvSpPr>
-        <p:spPr>
-          <a:xfrm>
-            <a:off x="685800" y="4400550"/>
-            <a:ext cx="5486400" cy="3600450"/>
+            <a:off x="457200" y="6356350"/>
+            <a:ext cx="2133600" cy="365125"/>
           </a:xfrm>
           <a:prstGeom prst="rect">
             <a:avLst/>
           </a:prstGeom>
         </p:spPr>
         <p:txBody>
-          <a:bodyPr vert="horz" lIns="91440" tIns="45720" rIns="91440" bIns="45720" rtlCol="0"/>
-          <a:lstStyle/>
-          <a:p>
-            <a:pPr lvl="0"/>
-            <a:r>
-              <a:rPr lang="en-US"/>
-              <a:t>Click to edit Master text styles</a:t>
-            </a:r>
-          </a:p>
-          <a:p>
-            <a:pPr lvl="1"/>
-            <a:r>
-              <a:rPr lang="en-US"/>
-              <a:t>Second level</a:t>
-            </a:r>
-          </a:p>
-          <a:p>
-            <a:pPr lvl="2"/>
-            <a:r>
-              <a:rPr lang="en-US"/>
-              <a:t>Third level</a:t>
-            </a:r>
-          </a:p>
-          <a:p>
-            <a:pPr lvl="3"/>
-            <a:r>
-              <a:rPr lang="en-US"/>
-              <a:t>Fourth level</a:t>
-            </a:r>
-          </a:p>
-          <a:p>
-            <a:pPr lvl="4"/>
-            <a:r>
-              <a:rPr lang="en-US"/>
-              <a:t>Fifth level</a:t>
-            </a:r>
-          </a:p>
-        </p:txBody>
-      </p:sp>
-      <p:sp>
-        <p:nvSpPr>
-          <p:cNvPr id="6" name="Footer Placeholder 5"/>
-          <p:cNvSpPr>
-            <a:spLocks noGrp="1"/>
-          </p:cNvSpPr>
-          <p:nvPr>
-            <p:ph type="ftr" sz="quarter" idx="4"/>
+          <a:bodyPr vert="horz" lIns="91440" tIns="45720" rIns="91440" bIns="45720" rtlCol="0" anchor="ctr"/>
+          <a:lstStyle>
+            <a:lvl1pPr algn="l">
+              <a:defRPr sz="1200">
+                <a:solidFill>
+                  <a:schemeClr val="tx1">
+                    <a:tint val="75000"/>
+                  </a:schemeClr>
+                </a:solidFill>
+              </a:defRPr>
+            </a:lvl1pPr>
+          </a:lstStyle>
+          <a:p>
+            <a:fld id="{5BCAD085-E8A6-8845-BD4E-CB4CCA059FC4}" type="datetimeFigureOut">
+              <a:rPr lang="en-US" smtClean="0"/>
+              <a:t>1/27/13</a:t>
+            </a:fld>
+            <a:endParaRPr lang="en-US"/>
+          </a:p>
+        </p:txBody>
+      </p:sp>
+      <p:sp>
+        <p:nvSpPr>
+          <p:cNvPr id="5" name="Footer Placeholder 4"/>
+          <p:cNvSpPr>
+            <a:spLocks noGrp="1"/>
+          </p:cNvSpPr>
+          <p:nvPr>
+            <p:ph type="ftr" sz="quarter" idx="3"/>
           </p:nvPr>
         </p:nvSpPr>
         <p:spPr>
           <a:xfrm>
-            <a:off x="0" y="8685213"/>
-            <a:ext cx="2971800" cy="458787"/>
+            <a:off x="3124200" y="6356350"/>
+            <a:ext cx="2895600" cy="365125"/>
           </a:xfrm>
           <a:prstGeom prst="rect">
             <a:avLst/>
           </a:prstGeom>
         </p:spPr>
         <p:txBody>
-          <a:bodyPr vert="horz" lIns="91440" tIns="45720" rIns="91440" bIns="45720" rtlCol="0" anchor="b"/>
+          <a:bodyPr vert="horz" lIns="91440" tIns="45720" rIns="91440" bIns="45720" rtlCol="0" anchor="ctr"/>
           <a:lstStyle>
-            <a:lvl1pPr algn="l">
-              <a:defRPr sz="1200"/>
+            <a:lvl1pPr algn="ctr">
+              <a:defRPr sz="1200">
+                <a:solidFill>
+                  <a:schemeClr val="tx1">
+                    <a:tint val="75000"/>
+                  </a:schemeClr>
+                </a:solidFill>
+              </a:defRPr>
             </a:lvl1pPr>
           </a:lstStyle>
           <a:p>
@@ -321,33 +2766,39 @@
       </p:sp>
       <p:sp>
         <p:nvSpPr>
-          <p:cNvPr id="7" name="Slide Number Placeholder 6"/>
-          <p:cNvSpPr>
-            <a:spLocks noGrp="1"/>
-          </p:cNvSpPr>
-          <p:nvPr>
-            <p:ph type="sldNum" sz="quarter" idx="5"/>
+          <p:cNvPr id="6" name="Slide Number Placeholder 5"/>
+          <p:cNvSpPr>
+            <a:spLocks noGrp="1"/>
+          </p:cNvSpPr>
+          <p:nvPr>
+            <p:ph type="sldNum" sz="quarter" idx="4"/>
           </p:nvPr>
         </p:nvSpPr>
         <p:spPr>
           <a:xfrm>
-            <a:off x="3884613" y="8685213"/>
-            <a:ext cx="2971800" cy="458787"/>
+            <a:off x="6553200" y="6356350"/>
+            <a:ext cx="2133600" cy="365125"/>
           </a:xfrm>
           <a:prstGeom prst="rect">
             <a:avLst/>
           </a:prstGeom>
         </p:spPr>
         <p:txBody>
-          <a:bodyPr vert="horz" lIns="91440" tIns="45720" rIns="91440" bIns="45720" rtlCol="0" anchor="b"/>
+          <a:bodyPr vert="horz" lIns="91440" tIns="45720" rIns="91440" bIns="45720" rtlCol="0" anchor="ctr"/>
           <a:lstStyle>
             <a:lvl1pPr algn="r">
-              <a:defRPr sz="1200"/>
+              <a:defRPr sz="1200">
+                <a:solidFill>
+                  <a:schemeClr val="tx1">
+                    <a:tint val="75000"/>
+                  </a:schemeClr>
+                </a:solidFill>
+              </a:defRPr>
             </a:lvl1pPr>
           </a:lstStyle>
           <a:p>
-            <a:fld id="{CE5E9CC1-C706-0F49-92D6-E571CC5EEA8F}" type="slidenum">
-              <a:rPr lang="en-US"/>
+            <a:fld id="{C1FF6DA9-008F-8B48-92A6-B652298478BF}" type="slidenum">
+              <a:rPr lang="en-US" smtClean="0"/>
               <a:t>‹#›</a:t>
             </a:fld>
             <a:endParaRPr lang="en-US"/>
@@ -357,339 +2808,27 @@
     </p:spTree>
     <p:extLst>
       <p:ext uri="{BB962C8B-B14F-4D97-AF65-F5344CB8AC3E}">
-        <p14:creationId xmlns:p14="http://schemas.microsoft.com/office/powerpoint/2010/main" val="1024086991"/>
+        <p14:creationId xmlns:p14="http://schemas.microsoft.com/office/powerpoint/2010/main" val="2209977519"/>
       </p:ext>
     </p:extLst>
   </p:cSld>
   <p:clrMap bg1="lt1" tx1="dk1" bg2="lt2" tx2="dk2" accent1="accent1" accent2="accent2" accent3="accent3" accent4="accent4" accent5="accent5" accent6="accent6" hlink="hlink" folHlink="folHlink"/>
-  <p:notesStyle>
-    <a:lvl1pPr marL="0" algn="l" defTabSz="914400" rtl="0" eaLnBrk="1" latinLnBrk="0" hangingPunct="1">
-      <a:defRPr sz="1200" kern="1200">
-        <a:solidFill>
-          <a:schemeClr val="tx1"/>
-        </a:solidFill>
-        <a:latin typeface="+mn-lt"/>
-        <a:ea typeface="+mn-ea"/>
-        <a:cs typeface="+mn-cs"/>
-      </a:defRPr>
-    </a:lvl1pPr>
-    <a:lvl2pPr marL="457200" algn="l" defTabSz="914400" rtl="0" eaLnBrk="1" latinLnBrk="0" hangingPunct="1">
-      <a:defRPr sz="1200" kern="1200">
-        <a:solidFill>
-          <a:schemeClr val="tx1"/>
-        </a:solidFill>
-        <a:latin typeface="+mn-lt"/>
-        <a:ea typeface="+mn-ea"/>
-        <a:cs typeface="+mn-cs"/>
-      </a:defRPr>
-    </a:lvl2pPr>
-    <a:lvl3pPr marL="914400" algn="l" defTabSz="914400" rtl="0" eaLnBrk="1" latinLnBrk="0" hangingPunct="1">
-      <a:defRPr sz="1200" kern="1200">
-        <a:solidFill>
-          <a:schemeClr val="tx1"/>
-        </a:solidFill>
-        <a:latin typeface="+mn-lt"/>
-        <a:ea typeface="+mn-ea"/>
-        <a:cs typeface="+mn-cs"/>
-      </a:defRPr>
-    </a:lvl3pPr>
-    <a:lvl4pPr marL="1371600" algn="l" defTabSz="914400" rtl="0" eaLnBrk="1" latinLnBrk="0" hangingPunct="1">
-      <a:defRPr sz="1200" kern="1200">
-        <a:solidFill>
-          <a:schemeClr val="tx1"/>
-        </a:solidFill>
-        <a:latin typeface="+mn-lt"/>
-        <a:ea typeface="+mn-ea"/>
-        <a:cs typeface="+mn-cs"/>
-      </a:defRPr>
-    </a:lvl4pPr>
-    <a:lvl5pPr marL="1828800" algn="l" defTabSz="914400" rtl="0" eaLnBrk="1" latinLnBrk="0" hangingPunct="1">
-      <a:defRPr sz="1200" kern="1200">
-        <a:solidFill>
-          <a:schemeClr val="tx1"/>
-        </a:solidFill>
-        <a:latin typeface="+mn-lt"/>
-        <a:ea typeface="+mn-ea"/>
-        <a:cs typeface="+mn-cs"/>
-      </a:defRPr>
-    </a:lvl5pPr>
-    <a:lvl6pPr marL="2286000" algn="l" defTabSz="914400" rtl="0" eaLnBrk="1" latinLnBrk="0" hangingPunct="1">
-      <a:defRPr sz="1200" kern="1200">
-        <a:solidFill>
-          <a:schemeClr val="tx1"/>
-        </a:solidFill>
-        <a:latin typeface="+mn-lt"/>
-        <a:ea typeface="+mn-ea"/>
-        <a:cs typeface="+mn-cs"/>
-      </a:defRPr>
-    </a:lvl6pPr>
-    <a:lvl7pPr marL="2743200" algn="l" defTabSz="914400" rtl="0" eaLnBrk="1" latinLnBrk="0" hangingPunct="1">
-      <a:defRPr sz="1200" kern="1200">
-        <a:solidFill>
-          <a:schemeClr val="tx1"/>
-        </a:solidFill>
-        <a:latin typeface="+mn-lt"/>
-        <a:ea typeface="+mn-ea"/>
-        <a:cs typeface="+mn-cs"/>
-      </a:defRPr>
-    </a:lvl7pPr>
-    <a:lvl8pPr marL="3200400" algn="l" defTabSz="914400" rtl="0" eaLnBrk="1" latinLnBrk="0" hangingPunct="1">
-      <a:defRPr sz="1200" kern="1200">
-        <a:solidFill>
-          <a:schemeClr val="tx1"/>
-        </a:solidFill>
-        <a:latin typeface="+mn-lt"/>
-        <a:ea typeface="+mn-ea"/>
-        <a:cs typeface="+mn-cs"/>
-      </a:defRPr>
-    </a:lvl8pPr>
-    <a:lvl9pPr marL="3657600" algn="l" defTabSz="914400" rtl="0" eaLnBrk="1" latinLnBrk="0" hangingPunct="1">
-      <a:defRPr sz="1200" kern="1200">
-        <a:solidFill>
-          <a:schemeClr val="tx1"/>
-        </a:solidFill>
-        <a:latin typeface="+mn-lt"/>
-        <a:ea typeface="+mn-ea"/>
-        <a:cs typeface="+mn-cs"/>
-      </a:defRPr>
-    </a:lvl9pPr>
-  </p:notesStyle>
-</p:notesMaster>
-</file>
-
-<file path=ppt/notesSlides/notesSlide1.xml><?xml version="1.0" encoding="utf-8"?>
-<p:notes xmlns:a="http://schemas.openxmlformats.org/drawingml/2006/main" xmlns:r="http://schemas.openxmlformats.org/officeDocument/2006/relationships" xmlns:p="http://schemas.openxmlformats.org/presentationml/2006/main">
-  <p:cSld>
-    <p:spTree>
-      <p:nvGrpSpPr>
-        <p:cNvPr id="1" name=""/>
-        <p:cNvGrpSpPr/>
-        <p:nvPr/>
-      </p:nvGrpSpPr>
-      <p:grpSpPr>
-        <a:xfrm>
-          <a:off x="0" y="0"/>
-          <a:ext cx="0" cy="0"/>
-          <a:chOff x="0" y="0"/>
-          <a:chExt cx="0" cy="0"/>
-        </a:xfrm>
-      </p:grpSpPr>
-      <p:sp>
-        <p:nvSpPr>
-          <p:cNvPr id="2" name="Slide Image Placeholder 1"/>
-          <p:cNvSpPr>
-            <a:spLocks noGrp="1" noRot="1" noChangeAspect="1"/>
-          </p:cNvSpPr>
-          <p:nvPr>
-            <p:ph type="sldImg"/>
-          </p:nvPr>
-        </p:nvSpPr>
-        <p:spPr/>
-      </p:sp>
-      <p:sp>
-        <p:nvSpPr>
-          <p:cNvPr id="3" name="Notes Placeholder 2"/>
-          <p:cNvSpPr>
-            <a:spLocks noGrp="1"/>
-          </p:cNvSpPr>
-          <p:nvPr>
-            <p:ph type="body" idx="1"/>
-          </p:nvPr>
-        </p:nvSpPr>
-        <p:spPr/>
-        <p:txBody>
-          <a:bodyPr/>
-          <a:lstStyle/>
-          <a:p>
-            <a:r>
-              <a:rPr lang="en-US" dirty="0"/>
-              <a:t/>
-            </a:r>
-            <a:endParaRPr lang="en-US" dirty="0"/>
-          </a:p>
-        </p:txBody>
-      </p:sp>
-      <p:sp>
-        <p:nvSpPr>
-          <p:cNvPr id="4" name="Slide Number Placeholder 3"/>
-          <p:cNvSpPr>
-            <a:spLocks noGrp="1"/>
-          </p:cNvSpPr>
-          <p:nvPr>
-            <p:ph type="sldNum" sz="quarter" idx="10"/>
-          </p:nvPr>
-        </p:nvSpPr>
-        <p:spPr/>
-        <p:txBody>
-          <a:bodyPr/>
-          <a:lstStyle/>
-          <a:p>
-            <a:fld id="{F7021451-1387-4CA6-816F-3879F97B5CBC}" type="slidenum">
-              <a:rPr lang="en-US"/>
-              <a:t>1</a:t>
-            </a:fld>
-            <a:endParaRPr lang="en-US"/>
-          </a:p>
-        </p:txBody>
-      </p:sp>
-    </p:spTree>
-    <p:extLst>
-      <p:ext uri="{BB962C8B-B14F-4D97-AF65-F5344CB8AC3E}">
-        <p14:creationId xmlns:p14="http://schemas.microsoft.com/office/powerpoint/2010/main" val="1024086991"/>
-      </p:ext>
-    </p:extLst>
-  </p:cSld>
-  <p:clrMapOvr>
-    <a:masterClrMapping/>
-  </p:clrMapOvr>
-</p:notes>
-</file>
-
-<file path=ppt/notesSlides/notesSlide2.xml><?xml version="1.0" encoding="utf-8"?>
-<p:notes xmlns:a="http://schemas.openxmlformats.org/drawingml/2006/main" xmlns:r="http://schemas.openxmlformats.org/officeDocument/2006/relationships" xmlns:p="http://schemas.openxmlformats.org/presentationml/2006/main">
-  <p:cSld>
-    <p:spTree>
-      <p:nvGrpSpPr>
-        <p:cNvPr id="1" name=""/>
-        <p:cNvGrpSpPr/>
-        <p:nvPr/>
-      </p:nvGrpSpPr>
-      <p:grpSpPr>
-        <a:xfrm>
-          <a:off x="0" y="0"/>
-          <a:ext cx="0" cy="0"/>
-          <a:chOff x="0" y="0"/>
-          <a:chExt cx="0" cy="0"/>
-        </a:xfrm>
-      </p:grpSpPr>
-      <p:sp>
-        <p:nvSpPr>
-          <p:cNvPr id="2" name="Slide Image Placeholder 1"/>
-          <p:cNvSpPr>
-            <a:spLocks noGrp="1" noRot="1" noChangeAspect="1"/>
-          </p:cNvSpPr>
-          <p:nvPr>
-            <p:ph type="sldImg"/>
-          </p:nvPr>
-        </p:nvSpPr>
-        <p:spPr/>
-      </p:sp>
-      <p:sp>
-        <p:nvSpPr>
-          <p:cNvPr id="3" name="Notes Placeholder 2"/>
-          <p:cNvSpPr>
-            <a:spLocks noGrp="1"/>
-          </p:cNvSpPr>
-          <p:nvPr>
-            <p:ph type="body" idx="1"/>
-          </p:nvPr>
-        </p:nvSpPr>
-        <p:spPr/>
-        <p:txBody>
-          <a:bodyPr/>
-          <a:lstStyle/>
-          <a:p>
-            <a:r>
-              <a:rPr lang="en-US" dirty="0"/>
-              <a:t/>
-            </a:r>
-            <a:endParaRPr lang="en-US" dirty="0"/>
-          </a:p>
-        </p:txBody>
-      </p:sp>
-      <p:sp>
-        <p:nvSpPr>
-          <p:cNvPr id="4" name="Slide Number Placeholder 3"/>
-          <p:cNvSpPr>
-            <a:spLocks noGrp="1"/>
-          </p:cNvSpPr>
-          <p:nvPr>
-            <p:ph type="sldNum" sz="quarter" idx="10"/>
-          </p:nvPr>
-        </p:nvSpPr>
-        <p:spPr/>
-        <p:txBody>
-          <a:bodyPr/>
-          <a:lstStyle/>
-          <a:p>
-            <a:fld id="{F7021451-1387-4CA6-816F-3879F97B5CBC}" type="slidenum">
-              <a:rPr lang="en-US"/>
-              <a:t>2</a:t>
-            </a:fld>
-            <a:endParaRPr lang="en-US"/>
-          </a:p>
-        </p:txBody>
-      </p:sp>
-    </p:spTree>
-    <p:extLst>
-      <p:ext uri="{BB962C8B-B14F-4D97-AF65-F5344CB8AC3E}">
-        <p14:creationId xmlns:p14="http://schemas.microsoft.com/office/powerpoint/2010/main" val="1024086991"/>
-      </p:ext>
-    </p:extLst>
-  </p:cSld>
-  <p:clrMapOvr>
-    <a:masterClrMapping/>
-  </p:clrMapOvr>
-</p:notes>
-</file>
-
-<file path=ppt/slideLayouts/slideLayout1.xml><?xml version="1.0" encoding="utf-8"?>
-<p:sldLayout xmlns:a="http://schemas.openxmlformats.org/drawingml/2006/main" xmlns:r="http://schemas.openxmlformats.org/officeDocument/2006/relationships" xmlns:p="http://schemas.openxmlformats.org/presentationml/2006/main" preserve="1">
-  <p:cSld name="DEFAULT">
-    <p:bg>
-      <p:bgRef idx="1001">
-        <a:schemeClr val="bg1"/>
-      </p:bgRef>
-    </p:bg>
-    <p:spTree>
-      <p:nvGrpSpPr>
-        <p:cNvPr id="1" name=""/>
-        <p:cNvGrpSpPr/>
-        <p:nvPr/>
-      </p:nvGrpSpPr>
-      <p:grpSpPr>
-        <a:xfrm>
-          <a:off x="0" y="0"/>
-          <a:ext cx="0" cy="0"/>
-          <a:chOff x="0" y="0"/>
-          <a:chExt cx="0" cy="0"/>
-        </a:xfrm>
-      </p:grpSpPr>
-    </p:spTree>
-  </p:cSld>
-  <p:clrMapOvr>
-    <a:masterClrMapping/>
-  </p:clrMapOvr>
-</p:sldLayout>
-</file>
-
-<file path=ppt/slideMasters/slideMaster1.xml><?xml version="1.0" encoding="utf-8"?>
-<p:sldMaster xmlns:a="http://schemas.openxmlformats.org/drawingml/2006/main" xmlns:r="http://schemas.openxmlformats.org/officeDocument/2006/relationships" xmlns:p="http://schemas.openxmlformats.org/presentationml/2006/main">
-  <p:cSld>
-    <p:spTree>
-      <p:nvGrpSpPr>
-        <p:cNvPr id="1" name=""/>
-        <p:cNvGrpSpPr/>
-        <p:nvPr/>
-      </p:nvGrpSpPr>
-      <p:grpSpPr>
-        <a:xfrm>
-          <a:off x="0" y="0"/>
-          <a:ext cx="0" cy="0"/>
-          <a:chOff x="0" y="0"/>
-          <a:chExt cx="0" cy="0"/>
-        </a:xfrm>
-      </p:grpSpPr>
-    </p:spTree>
-  </p:cSld>
-  <p:clrMap bg1="lt1" tx1="dk1" bg2="lt2" tx2="dk2" accent1="accent1" accent2="accent2" accent3="accent3" accent4="accent4" accent5="accent5" accent6="accent6" hlink="hlink" folHlink="folHlink"/>
   <p:sldLayoutIdLst>
     <p:sldLayoutId id="2147483649" r:id="rId1"/>
+    <p:sldLayoutId id="2147483650" r:id="rId2"/>
+    <p:sldLayoutId id="2147483651" r:id="rId3"/>
+    <p:sldLayoutId id="2147483652" r:id="rId4"/>
+    <p:sldLayoutId id="2147483653" r:id="rId5"/>
+    <p:sldLayoutId id="2147483654" r:id="rId6"/>
+    <p:sldLayoutId id="2147483655" r:id="rId7"/>
+    <p:sldLayoutId id="2147483656" r:id="rId8"/>
+    <p:sldLayoutId id="2147483657" r:id="rId9"/>
+    <p:sldLayoutId id="2147483658" r:id="rId10"/>
+    <p:sldLayoutId id="2147483659" r:id="rId11"/>
   </p:sldLayoutIdLst>
-  <p:hf sldNum="0" hdr="0" ftr="0" dt="0"/>
   <p:txStyles>
     <p:titleStyle>
-      <a:lvl1pPr algn="ctr" defTabSz="914400" rtl="0" eaLnBrk="1" latinLnBrk="0" hangingPunct="1">
+      <a:lvl1pPr algn="ctr" defTabSz="457200" rtl="0" eaLnBrk="1" latinLnBrk="0" hangingPunct="1">
         <a:spcBef>
           <a:spcPct val="0"/>
         </a:spcBef>
@@ -705,11 +2844,11 @@
       </a:lvl1pPr>
     </p:titleStyle>
     <p:bodyStyle>
-      <a:lvl1pPr marL="342900" indent="-342900" algn="l" defTabSz="914400" rtl="0" eaLnBrk="1" latinLnBrk="0" hangingPunct="1">
+      <a:lvl1pPr marL="342900" indent="-342900" algn="l" defTabSz="457200" rtl="0" eaLnBrk="1" latinLnBrk="0" hangingPunct="1">
         <a:spcBef>
           <a:spcPct val="20000"/>
         </a:spcBef>
-        <a:buFont typeface="Arial" pitchFamily="34" charset="0"/>
+        <a:buFont typeface="Arial"/>
         <a:buChar char="•"/>
         <a:defRPr sz="3200" kern="1200">
           <a:solidFill>
@@ -720,11 +2859,11 @@
           <a:cs typeface="+mn-cs"/>
         </a:defRPr>
       </a:lvl1pPr>
-      <a:lvl2pPr marL="742950" indent="-285750" algn="l" defTabSz="914400" rtl="0" eaLnBrk="1" latinLnBrk="0" hangingPunct="1">
+      <a:lvl2pPr marL="742950" indent="-285750" algn="l" defTabSz="457200" rtl="0" eaLnBrk="1" latinLnBrk="0" hangingPunct="1">
         <a:spcBef>
           <a:spcPct val="20000"/>
         </a:spcBef>
-        <a:buFont typeface="Arial" pitchFamily="34" charset="0"/>
+        <a:buFont typeface="Arial"/>
         <a:buChar char="–"/>
         <a:defRPr sz="2800" kern="1200">
           <a:solidFill>
@@ -735,11 +2874,11 @@
           <a:cs typeface="+mn-cs"/>
         </a:defRPr>
       </a:lvl2pPr>
-      <a:lvl3pPr marL="1143000" indent="-228600" algn="l" defTabSz="914400" rtl="0" eaLnBrk="1" latinLnBrk="0" hangingPunct="1">
+      <a:lvl3pPr marL="1143000" indent="-228600" algn="l" defTabSz="457200" rtl="0" eaLnBrk="1" latinLnBrk="0" hangingPunct="1">
         <a:spcBef>
           <a:spcPct val="20000"/>
         </a:spcBef>
-        <a:buFont typeface="Arial" pitchFamily="34" charset="0"/>
+        <a:buFont typeface="Arial"/>
         <a:buChar char="•"/>
         <a:defRPr sz="2400" kern="1200">
           <a:solidFill>
@@ -750,11 +2889,11 @@
           <a:cs typeface="+mn-cs"/>
         </a:defRPr>
       </a:lvl3pPr>
-      <a:lvl4pPr marL="1600200" indent="-228600" algn="l" defTabSz="914400" rtl="0" eaLnBrk="1" latinLnBrk="0" hangingPunct="1">
+      <a:lvl4pPr marL="1600200" indent="-228600" algn="l" defTabSz="457200" rtl="0" eaLnBrk="1" latinLnBrk="0" hangingPunct="1">
         <a:spcBef>
           <a:spcPct val="20000"/>
         </a:spcBef>
-        <a:buFont typeface="Arial" pitchFamily="34" charset="0"/>
+        <a:buFont typeface="Arial"/>
         <a:buChar char="–"/>
         <a:defRPr sz="2000" kern="1200">
           <a:solidFill>
@@ -765,11 +2904,11 @@
           <a:cs typeface="+mn-cs"/>
         </a:defRPr>
       </a:lvl4pPr>
-      <a:lvl5pPr marL="2057400" indent="-228600" algn="l" defTabSz="914400" rtl="0" eaLnBrk="1" latinLnBrk="0" hangingPunct="1">
+      <a:lvl5pPr marL="2057400" indent="-228600" algn="l" defTabSz="457200" rtl="0" eaLnBrk="1" latinLnBrk="0" hangingPunct="1">
         <a:spcBef>
           <a:spcPct val="20000"/>
         </a:spcBef>
-        <a:buFont typeface="Arial" pitchFamily="34" charset="0"/>
+        <a:buFont typeface="Arial"/>
         <a:buChar char="»"/>
         <a:defRPr sz="2000" kern="1200">
           <a:solidFill>
@@ -780,11 +2919,11 @@
           <a:cs typeface="+mn-cs"/>
         </a:defRPr>
       </a:lvl5pPr>
-      <a:lvl6pPr marL="2514600" indent="-228600" algn="l" defTabSz="914400" rtl="0" eaLnBrk="1" latinLnBrk="0" hangingPunct="1">
+      <a:lvl6pPr marL="2514600" indent="-228600" algn="l" defTabSz="457200" rtl="0" eaLnBrk="1" latinLnBrk="0" hangingPunct="1">
         <a:spcBef>
           <a:spcPct val="20000"/>
         </a:spcBef>
-        <a:buFont typeface="Arial" pitchFamily="34" charset="0"/>
+        <a:buFont typeface="Arial"/>
         <a:buChar char="•"/>
         <a:defRPr sz="2000" kern="1200">
           <a:solidFill>
@@ -795,11 +2934,11 @@
           <a:cs typeface="+mn-cs"/>
         </a:defRPr>
       </a:lvl6pPr>
-      <a:lvl7pPr marL="2971800" indent="-228600" algn="l" defTabSz="914400" rtl="0" eaLnBrk="1" latinLnBrk="0" hangingPunct="1">
+      <a:lvl7pPr marL="2971800" indent="-228600" algn="l" defTabSz="457200" rtl="0" eaLnBrk="1" latinLnBrk="0" hangingPunct="1">
         <a:spcBef>
           <a:spcPct val="20000"/>
         </a:spcBef>
-        <a:buFont typeface="Arial" pitchFamily="34" charset="0"/>
+        <a:buFont typeface="Arial"/>
         <a:buChar char="•"/>
         <a:defRPr sz="2000" kern="1200">
           <a:solidFill>
@@ -810,11 +2949,11 @@
           <a:cs typeface="+mn-cs"/>
         </a:defRPr>
       </a:lvl7pPr>
-      <a:lvl8pPr marL="3429000" indent="-228600" algn="l" defTabSz="914400" rtl="0" eaLnBrk="1" latinLnBrk="0" hangingPunct="1">
+      <a:lvl8pPr marL="3429000" indent="-228600" algn="l" defTabSz="457200" rtl="0" eaLnBrk="1" latinLnBrk="0" hangingPunct="1">
         <a:spcBef>
           <a:spcPct val="20000"/>
         </a:spcBef>
-        <a:buFont typeface="Arial" pitchFamily="34" charset="0"/>
+        <a:buFont typeface="Arial"/>
         <a:buChar char="•"/>
         <a:defRPr sz="2000" kern="1200">
           <a:solidFill>
@@ -825,11 +2964,11 @@
           <a:cs typeface="+mn-cs"/>
         </a:defRPr>
       </a:lvl8pPr>
-      <a:lvl9pPr marL="3886200" indent="-228600" algn="l" defTabSz="914400" rtl="0" eaLnBrk="1" latinLnBrk="0" hangingPunct="1">
+      <a:lvl9pPr marL="3886200" indent="-228600" algn="l" defTabSz="457200" rtl="0" eaLnBrk="1" latinLnBrk="0" hangingPunct="1">
         <a:spcBef>
           <a:spcPct val="20000"/>
         </a:spcBef>
-        <a:buFont typeface="Arial" pitchFamily="34" charset="0"/>
+        <a:buFont typeface="Arial"/>
         <a:buChar char="•"/>
         <a:defRPr sz="2000" kern="1200">
           <a:solidFill>
@@ -845,7 +2984,7 @@
       <a:defPPr>
         <a:defRPr lang="en-US"/>
       </a:defPPr>
-      <a:lvl1pPr marL="0" algn="l" defTabSz="914400" rtl="0" eaLnBrk="1" latinLnBrk="0" hangingPunct="1">
+      <a:lvl1pPr marL="0" algn="l" defTabSz="457200" rtl="0" eaLnBrk="1" latinLnBrk="0" hangingPunct="1">
         <a:defRPr sz="1800" kern="1200">
           <a:solidFill>
             <a:schemeClr val="tx1"/>
@@ -855,7 +2994,7 @@
           <a:cs typeface="+mn-cs"/>
         </a:defRPr>
       </a:lvl1pPr>
-      <a:lvl2pPr marL="457200" algn="l" defTabSz="914400" rtl="0" eaLnBrk="1" latinLnBrk="0" hangingPunct="1">
+      <a:lvl2pPr marL="457200" algn="l" defTabSz="457200" rtl="0" eaLnBrk="1" latinLnBrk="0" hangingPunct="1">
         <a:defRPr sz="1800" kern="1200">
           <a:solidFill>
             <a:schemeClr val="tx1"/>
@@ -865,7 +3004,7 @@
           <a:cs typeface="+mn-cs"/>
         </a:defRPr>
       </a:lvl2pPr>
-      <a:lvl3pPr marL="914400" algn="l" defTabSz="914400" rtl="0" eaLnBrk="1" latinLnBrk="0" hangingPunct="1">
+      <a:lvl3pPr marL="914400" algn="l" defTabSz="457200" rtl="0" eaLnBrk="1" latinLnBrk="0" hangingPunct="1">
         <a:defRPr sz="1800" kern="1200">
           <a:solidFill>
             <a:schemeClr val="tx1"/>
@@ -875,7 +3014,7 @@
           <a:cs typeface="+mn-cs"/>
         </a:defRPr>
       </a:lvl3pPr>
-      <a:lvl4pPr marL="1371600" algn="l" defTabSz="914400" rtl="0" eaLnBrk="1" latinLnBrk="0" hangingPunct="1">
+      <a:lvl4pPr marL="1371600" algn="l" defTabSz="457200" rtl="0" eaLnBrk="1" latinLnBrk="0" hangingPunct="1">
         <a:defRPr sz="1800" kern="1200">
           <a:solidFill>
             <a:schemeClr val="tx1"/>
@@ -885,7 +3024,7 @@
           <a:cs typeface="+mn-cs"/>
         </a:defRPr>
       </a:lvl4pPr>
-      <a:lvl5pPr marL="1828800" algn="l" defTabSz="914400" rtl="0" eaLnBrk="1" latinLnBrk="0" hangingPunct="1">
+      <a:lvl5pPr marL="1828800" algn="l" defTabSz="457200" rtl="0" eaLnBrk="1" latinLnBrk="0" hangingPunct="1">
         <a:defRPr sz="1800" kern="1200">
           <a:solidFill>
             <a:schemeClr val="tx1"/>
@@ -895,7 +3034,7 @@
           <a:cs typeface="+mn-cs"/>
         </a:defRPr>
       </a:lvl5pPr>
-      <a:lvl6pPr marL="2286000" algn="l" defTabSz="914400" rtl="0" eaLnBrk="1" latinLnBrk="0" hangingPunct="1">
+      <a:lvl6pPr marL="2286000" algn="l" defTabSz="457200" rtl="0" eaLnBrk="1" latinLnBrk="0" hangingPunct="1">
         <a:defRPr sz="1800" kern="1200">
           <a:solidFill>
             <a:schemeClr val="tx1"/>
@@ -905,7 +3044,7 @@
           <a:cs typeface="+mn-cs"/>
         </a:defRPr>
       </a:lvl6pPr>
-      <a:lvl7pPr marL="2743200" algn="l" defTabSz="914400" rtl="0" eaLnBrk="1" latinLnBrk="0" hangingPunct="1">
+      <a:lvl7pPr marL="2743200" algn="l" defTabSz="457200" rtl="0" eaLnBrk="1" latinLnBrk="0" hangingPunct="1">
         <a:defRPr sz="1800" kern="1200">
           <a:solidFill>
             <a:schemeClr val="tx1"/>
@@ -915,7 +3054,7 @@
           <a:cs typeface="+mn-cs"/>
         </a:defRPr>
       </a:lvl7pPr>
-      <a:lvl8pPr marL="3200400" algn="l" defTabSz="914400" rtl="0" eaLnBrk="1" latinLnBrk="0" hangingPunct="1">
+      <a:lvl8pPr marL="3200400" algn="l" defTabSz="457200" rtl="0" eaLnBrk="1" latinLnBrk="0" hangingPunct="1">
         <a:defRPr sz="1800" kern="1200">
           <a:solidFill>
             <a:schemeClr val="tx1"/>
@@ -925,7 +3064,7 @@
           <a:cs typeface="+mn-cs"/>
         </a:defRPr>
       </a:lvl8pPr>
-      <a:lvl9pPr marL="3657600" algn="l" defTabSz="914400" rtl="0" eaLnBrk="1" latinLnBrk="0" hangingPunct="1">
+      <a:lvl9pPr marL="3657600" algn="l" defTabSz="457200" rtl="0" eaLnBrk="1" latinLnBrk="0" hangingPunct="1">
         <a:defRPr sz="1800" kern="1200">
           <a:solidFill>
             <a:schemeClr val="tx1"/>
@@ -941,13 +3080,14 @@
 </file>
 
 <file path=ppt/slides/slide1.xml><?xml version="1.0" encoding="utf-8"?>
-<p:sld xmlns:a="http://schemas.openxmlformats.org/drawingml/2006/main" xmlns:r="http://schemas.openxmlformats.org/officeDocument/2006/relationships" xmlns:p="http://schemas.openxmlformats.org/presentationml/2006/main">
-  <p:cSld name="Slide 1">
+<p:sld xmlns:a="http://schemas.openxmlformats.org/drawingml/2006/main" xmlns:p="http://schemas.openxmlformats.org/presentationml/2006/main" xmlns:r="http://schemas.openxmlformats.org/officeDocument/2006/relationships">
+  <p:cSld>
     <p:bg>
       <p:bgPr>
         <a:solidFill>
           <a:srgbClr val="1F3864"/>
         </a:solidFill>
+        <a:effectLst/>
       </p:bgPr>
     </p:bg>
     <p:spTree>
@@ -956,17 +3096,10 @@
         <p:cNvGrpSpPr/>
         <p:nvPr/>
       </p:nvGrpSpPr>
-      <p:grpSpPr>
-        <a:xfrm>
-          <a:off x="0" y="0"/>
-          <a:ext cx="0" cy="0"/>
-          <a:chOff x="0" y="0"/>
-          <a:chExt cx="0" cy="0"/>
-        </a:xfrm>
-      </p:grpSpPr>
-      <p:sp>
-        <p:nvSpPr>
-          <p:cNvPr id="2" name="Shape 0"/>
+      <p:grpSpPr/>
+      <p:sp>
+        <p:nvSpPr>
+          <p:cNvPr id="2" name="Rectangle 1"/>
           <p:cNvSpPr/>
           <p:nvPr/>
         </p:nvSpPr>
@@ -981,12 +3114,36 @@
           <a:solidFill>
             <a:srgbClr val="C9A227"/>
           </a:solidFill>
-          <a:ln/>
+          <a:ln>
+            <a:noFill/>
+          </a:ln>
+          <a:effectLst/>
         </p:spPr>
-      </p:sp>
-      <p:sp>
-        <p:nvSpPr>
-          <p:cNvPr id="3" name="Shape 1"/>
+        <p:style>
+          <a:lnRef idx="1">
+            <a:schemeClr val="accent1"/>
+          </a:lnRef>
+          <a:fillRef idx="3">
+            <a:schemeClr val="accent1"/>
+          </a:fillRef>
+          <a:effectRef idx="2">
+            <a:schemeClr val="accent1"/>
+          </a:effectRef>
+          <a:fontRef idx="minor">
+            <a:schemeClr val="lt1"/>
+          </a:fontRef>
+        </p:style>
+        <p:txBody>
+          <a:bodyPr rtlCol="0" anchor="ctr"/>
+          <a:lstStyle/>
+          <a:p>
+            <a:pPr algn="ctr"/>
+          </a:p>
+        </p:txBody>
+      </p:sp>
+      <p:sp>
+        <p:nvSpPr>
+          <p:cNvPr id="3" name="Rectangle 2"/>
           <p:cNvSpPr/>
           <p:nvPr/>
         </p:nvSpPr>
@@ -1001,8 +3158,32 @@
           <a:solidFill>
             <a:srgbClr val="C9A227"/>
           </a:solidFill>
-          <a:ln/>
+          <a:ln>
+            <a:noFill/>
+          </a:ln>
+          <a:effectLst/>
         </p:spPr>
+        <p:style>
+          <a:lnRef idx="1">
+            <a:schemeClr val="accent1"/>
+          </a:lnRef>
+          <a:fillRef idx="3">
+            <a:schemeClr val="accent1"/>
+          </a:fillRef>
+          <a:effectRef idx="2">
+            <a:schemeClr val="accent1"/>
+          </a:effectRef>
+          <a:fontRef idx="minor">
+            <a:schemeClr val="lt1"/>
+          </a:fontRef>
+        </p:style>
+        <p:txBody>
+          <a:bodyPr rtlCol="0" anchor="ctr"/>
+          <a:lstStyle/>
+          <a:p>
+            <a:pPr algn="ctr"/>
+          </a:p>
+        </p:txBody>
       </p:sp>
       <p:sp>
         <p:nvSpPr>
@@ -1019,27 +3200,41 @@
             <a:avLst/>
           </a:prstGeom>
           <a:noFill/>
-          <a:ln/>
+          <a:ln>
+            <a:noFill/>
+          </a:ln>
+          <a:effectLst/>
         </p:spPr>
-        <p:txBody>
-          <a:bodyPr wrap="square" rtlCol="0" anchor="ctr"/>
-          <a:lstStyle/>
-          <a:p>
-            <a:pPr algn="l" indent="0" marL="0">
-              <a:buNone/>
-            </a:pPr>
-            <a:r>
-              <a:rPr lang="en-US" sz="4400" b="1" dirty="0">
+        <p:style>
+          <a:lnRef idx="1">
+            <a:schemeClr val="accent1"/>
+          </a:lnRef>
+          <a:fillRef idx="3">
+            <a:schemeClr val="accent1"/>
+          </a:fillRef>
+          <a:effectRef idx="2">
+            <a:schemeClr val="accent1"/>
+          </a:effectRef>
+          <a:fontRef idx="minor">
+            <a:schemeClr val="lt1"/>
+          </a:fontRef>
+        </p:style>
+        <p:txBody>
+          <a:bodyPr rtlCol="0" anchor="ctr" wrap="square" lIns="0" rIns="0" tIns="0" bIns="0">
+            <a:noAutofit/>
+          </a:bodyPr>
+          <a:lstStyle/>
+          <a:p>
+            <a:pPr algn="l"/>
+            <a:r>
+              <a:rPr sz="4400" b="1" i="0">
                 <a:solidFill>
                   <a:srgbClr val="FFFFFF"/>
                 </a:solidFill>
-                <a:latin typeface="Segoe UI" pitchFamily="34" charset="0"/>
-                <a:ea typeface="Segoe UI" pitchFamily="34" charset="-122"/>
-                <a:cs typeface="Segoe UI" pitchFamily="34" charset="-120"/>
+                <a:latin typeface="Segoe UI"/>
               </a:rPr>
               <a:t>Presentation Title</a:t>
             </a:r>
-            <a:endParaRPr lang="en-US" sz="4400" dirty="0"/>
           </a:p>
         </p:txBody>
       </p:sp>
@@ -1051,34 +3246,48 @@
         </p:nvSpPr>
         <p:spPr>
           <a:xfrm>
-            <a:off x="822960" y="3749040"/>
+            <a:off x="822960" y="3749039"/>
             <a:ext cx="10515600" cy="731520"/>
           </a:xfrm>
           <a:prstGeom prst="rect">
             <a:avLst/>
           </a:prstGeom>
           <a:noFill/>
-          <a:ln/>
+          <a:ln>
+            <a:noFill/>
+          </a:ln>
+          <a:effectLst/>
         </p:spPr>
-        <p:txBody>
-          <a:bodyPr wrap="square" rtlCol="0" anchor="ctr"/>
-          <a:lstStyle/>
-          <a:p>
-            <a:pPr algn="l" indent="0" marL="0">
-              <a:buNone/>
-            </a:pPr>
-            <a:r>
-              <a:rPr lang="en-US" sz="2200" dirty="0">
+        <p:style>
+          <a:lnRef idx="1">
+            <a:schemeClr val="accent1"/>
+          </a:lnRef>
+          <a:fillRef idx="3">
+            <a:schemeClr val="accent1"/>
+          </a:fillRef>
+          <a:effectRef idx="2">
+            <a:schemeClr val="accent1"/>
+          </a:effectRef>
+          <a:fontRef idx="minor">
+            <a:schemeClr val="lt1"/>
+          </a:fontRef>
+        </p:style>
+        <p:txBody>
+          <a:bodyPr rtlCol="0" anchor="ctr" wrap="square" lIns="0" rIns="0" tIns="0" bIns="0">
+            <a:noAutofit/>
+          </a:bodyPr>
+          <a:lstStyle/>
+          <a:p>
+            <a:pPr algn="l"/>
+            <a:r>
+              <a:rPr sz="2200" b="0" i="0">
                 <a:solidFill>
                   <a:srgbClr val="D6DCE5"/>
                 </a:solidFill>
-                <a:latin typeface="Segoe UI" pitchFamily="34" charset="0"/>
-                <a:ea typeface="Segoe UI" pitchFamily="34" charset="-122"/>
-                <a:cs typeface="Segoe UI" pitchFamily="34" charset="-120"/>
+                <a:latin typeface="Segoe UI"/>
               </a:rPr>
               <a:t>Client / engagement subtitle</a:t>
             </a:r>
-            <a:endParaRPr lang="en-US" sz="2200" dirty="0"/>
           </a:p>
         </p:txBody>
       </p:sp>
@@ -1097,27 +3306,41 @@
             <a:avLst/>
           </a:prstGeom>
           <a:noFill/>
-          <a:ln/>
+          <a:ln>
+            <a:noFill/>
+          </a:ln>
+          <a:effectLst/>
         </p:spPr>
-        <p:txBody>
-          <a:bodyPr wrap="square" rtlCol="0" anchor="ctr"/>
-          <a:lstStyle/>
-          <a:p>
-            <a:pPr algn="l" indent="0" marL="0">
-              <a:buNone/>
-            </a:pPr>
-            <a:r>
-              <a:rPr lang="en-US" sz="1400" dirty="0">
+        <p:style>
+          <a:lnRef idx="1">
+            <a:schemeClr val="accent1"/>
+          </a:lnRef>
+          <a:fillRef idx="3">
+            <a:schemeClr val="accent1"/>
+          </a:fillRef>
+          <a:effectRef idx="2">
+            <a:schemeClr val="accent1"/>
+          </a:effectRef>
+          <a:fontRef idx="minor">
+            <a:schemeClr val="lt1"/>
+          </a:fontRef>
+        </p:style>
+        <p:txBody>
+          <a:bodyPr rtlCol="0" anchor="ctr" wrap="square" lIns="0" rIns="0" tIns="0" bIns="0">
+            <a:noAutofit/>
+          </a:bodyPr>
+          <a:lstStyle/>
+          <a:p>
+            <a:pPr algn="l"/>
+            <a:r>
+              <a:rPr sz="1400" b="0" i="0">
                 <a:solidFill>
                   <a:srgbClr val="C9A227"/>
                 </a:solidFill>
-                <a:latin typeface="Segoe UI" pitchFamily="34" charset="0"/>
-                <a:ea typeface="Segoe UI" pitchFamily="34" charset="-122"/>
-                <a:cs typeface="Segoe UI" pitchFamily="34" charset="-120"/>
+                <a:latin typeface="Segoe UI"/>
               </a:rPr>
               <a:t>Date</a:t>
             </a:r>
-            <a:endParaRPr lang="en-US" sz="1400" dirty="0"/>
           </a:p>
         </p:txBody>
       </p:sp>
@@ -1130,13 +3353,14 @@
 </file>
 
 <file path=ppt/slides/slide2.xml><?xml version="1.0" encoding="utf-8"?>
-<p:sld xmlns:a="http://schemas.openxmlformats.org/drawingml/2006/main" xmlns:r="http://schemas.openxmlformats.org/officeDocument/2006/relationships" xmlns:p="http://schemas.openxmlformats.org/presentationml/2006/main">
-  <p:cSld name="Slide 2">
+<p:sld xmlns:a="http://schemas.openxmlformats.org/drawingml/2006/main" xmlns:p="http://schemas.openxmlformats.org/presentationml/2006/main" xmlns:r="http://schemas.openxmlformats.org/officeDocument/2006/relationships">
+  <p:cSld>
     <p:bg>
       <p:bgPr>
         <a:solidFill>
           <a:srgbClr val="FFFFFF"/>
         </a:solidFill>
+        <a:effectLst/>
       </p:bgPr>
     </p:bg>
     <p:spTree>
@@ -1145,17 +3369,10 @@
         <p:cNvGrpSpPr/>
         <p:nvPr/>
       </p:nvGrpSpPr>
-      <p:grpSpPr>
-        <a:xfrm>
-          <a:off x="0" y="0"/>
-          <a:ext cx="0" cy="0"/>
-          <a:chOff x="0" y="0"/>
-          <a:chExt cx="0" cy="0"/>
-        </a:xfrm>
-      </p:grpSpPr>
-      <p:sp>
-        <p:nvSpPr>
-          <p:cNvPr id="2" name="Shape 0"/>
+      <p:grpSpPr/>
+      <p:sp>
+        <p:nvSpPr>
+          <p:cNvPr id="2" name="Rectangle 1"/>
           <p:cNvSpPr/>
           <p:nvPr/>
         </p:nvSpPr>
@@ -1170,12 +3387,36 @@
           <a:solidFill>
             <a:srgbClr val="1F3864"/>
           </a:solidFill>
-          <a:ln/>
+          <a:ln>
+            <a:noFill/>
+          </a:ln>
+          <a:effectLst/>
         </p:spPr>
-      </p:sp>
-      <p:sp>
-        <p:nvSpPr>
-          <p:cNvPr id="3" name="Shape 1"/>
+        <p:style>
+          <a:lnRef idx="1">
+            <a:schemeClr val="accent1"/>
+          </a:lnRef>
+          <a:fillRef idx="3">
+            <a:schemeClr val="accent1"/>
+          </a:fillRef>
+          <a:effectRef idx="2">
+            <a:schemeClr val="accent1"/>
+          </a:effectRef>
+          <a:fontRef idx="minor">
+            <a:schemeClr val="lt1"/>
+          </a:fontRef>
+        </p:style>
+        <p:txBody>
+          <a:bodyPr rtlCol="0" anchor="ctr"/>
+          <a:lstStyle/>
+          <a:p>
+            <a:pPr algn="ctr"/>
+          </a:p>
+        </p:txBody>
+      </p:sp>
+      <p:sp>
+        <p:nvSpPr>
+          <p:cNvPr id="3" name="Rectangle 2"/>
           <p:cNvSpPr/>
           <p:nvPr/>
         </p:nvSpPr>
@@ -1190,8 +3431,32 @@
           <a:solidFill>
             <a:srgbClr val="C9A227"/>
           </a:solidFill>
-          <a:ln/>
+          <a:ln>
+            <a:noFill/>
+          </a:ln>
+          <a:effectLst/>
         </p:spPr>
+        <p:style>
+          <a:lnRef idx="1">
+            <a:schemeClr val="accent1"/>
+          </a:lnRef>
+          <a:fillRef idx="3">
+            <a:schemeClr val="accent1"/>
+          </a:fillRef>
+          <a:effectRef idx="2">
+            <a:schemeClr val="accent1"/>
+          </a:effectRef>
+          <a:fontRef idx="minor">
+            <a:schemeClr val="lt1"/>
+          </a:fontRef>
+        </p:style>
+        <p:txBody>
+          <a:bodyPr rtlCol="0" anchor="ctr"/>
+          <a:lstStyle/>
+          <a:p>
+            <a:pPr algn="ctr"/>
+          </a:p>
+        </p:txBody>
       </p:sp>
       <p:sp>
         <p:nvSpPr>
@@ -1208,35 +3473,47 @@
             <a:avLst/>
           </a:prstGeom>
           <a:noFill/>
-          <a:ln/>
+          <a:ln>
+            <a:noFill/>
+          </a:ln>
+          <a:effectLst/>
         </p:spPr>
-        <p:txBody>
-          <a:bodyPr wrap="square" rtlCol="0" anchor="ctr">
+        <p:style>
+          <a:lnRef idx="1">
+            <a:schemeClr val="accent1"/>
+          </a:lnRef>
+          <a:fillRef idx="3">
+            <a:schemeClr val="accent1"/>
+          </a:fillRef>
+          <a:effectRef idx="2">
+            <a:schemeClr val="accent1"/>
+          </a:effectRef>
+          <a:fontRef idx="minor">
+            <a:schemeClr val="lt1"/>
+          </a:fontRef>
+        </p:style>
+        <p:txBody>
+          <a:bodyPr rtlCol="0" anchor="ctr" wrap="square" lIns="0" rIns="0" tIns="0" bIns="0">
             <a:normAutofit/>
           </a:bodyPr>
           <a:lstStyle/>
           <a:p>
-            <a:pPr algn="l" indent="0" marL="0">
-              <a:buNone/>
-            </a:pPr>
-            <a:r>
-              <a:rPr lang="en-US" sz="2600" b="1" dirty="0">
+            <a:pPr algn="l"/>
+            <a:r>
+              <a:rPr sz="2600" b="1" i="0">
                 <a:solidFill>
                   <a:srgbClr val="FFFFFF"/>
                 </a:solidFill>
-                <a:latin typeface="Segoe UI" pitchFamily="34" charset="0"/>
-                <a:ea typeface="Segoe UI" pitchFamily="34" charset="-122"/>
-                <a:cs typeface="Segoe UI" pitchFamily="34" charset="-120"/>
+                <a:latin typeface="Segoe UI"/>
               </a:rPr>
               <a:t>Financial Highlights</a:t>
             </a:r>
-            <a:endParaRPr lang="en-US" sz="2600" dirty="0"/>
-          </a:p>
-        </p:txBody>
-      </p:sp>
-      <p:sp>
-        <p:nvSpPr>
-          <p:cNvPr id="5" name="Shape 3"/>
+          </a:p>
+        </p:txBody>
+      </p:sp>
+      <p:sp>
+        <p:nvSpPr>
+          <p:cNvPr id="5" name="Rounded Rectangle 4"/>
           <p:cNvSpPr/>
           <p:nvPr/>
         </p:nvSpPr>
@@ -1247,7 +3524,7 @@
           </a:xfrm>
           <a:prstGeom prst="roundRect">
             <a:avLst>
-              <a:gd name="adj" fmla="val 3077"/>
+              <a:gd name="adj" fmla="val 3076"/>
             </a:avLst>
           </a:prstGeom>
           <a:solidFill>
@@ -1257,9 +3534,30 @@
             <a:solidFill>
               <a:srgbClr val="2E5395"/>
             </a:solidFill>
-            <a:prstDash val="solid"/>
           </a:ln>
+          <a:effectLst/>
         </p:spPr>
+        <p:style>
+          <a:lnRef idx="1">
+            <a:schemeClr val="accent1"/>
+          </a:lnRef>
+          <a:fillRef idx="3">
+            <a:schemeClr val="accent1"/>
+          </a:fillRef>
+          <a:effectRef idx="2">
+            <a:schemeClr val="accent1"/>
+          </a:effectRef>
+          <a:fontRef idx="minor">
+            <a:schemeClr val="lt1"/>
+          </a:fontRef>
+        </p:style>
+        <p:txBody>
+          <a:bodyPr rtlCol="0" anchor="ctr"/>
+          <a:lstStyle/>
+          <a:p>
+            <a:pPr algn="ctr"/>
+          </a:p>
+        </p:txBody>
       </p:sp>
       <p:sp>
         <p:nvSpPr>
@@ -1276,29 +3574,41 @@
             <a:avLst/>
           </a:prstGeom>
           <a:noFill/>
-          <a:ln/>
+          <a:ln>
+            <a:noFill/>
+          </a:ln>
+          <a:effectLst/>
         </p:spPr>
-        <p:txBody>
-          <a:bodyPr wrap="square" rtlCol="0" anchor="ctr">
+        <p:style>
+          <a:lnRef idx="1">
+            <a:schemeClr val="accent1"/>
+          </a:lnRef>
+          <a:fillRef idx="3">
+            <a:schemeClr val="accent1"/>
+          </a:fillRef>
+          <a:effectRef idx="2">
+            <a:schemeClr val="accent1"/>
+          </a:effectRef>
+          <a:fontRef idx="minor">
+            <a:schemeClr val="lt1"/>
+          </a:fontRef>
+        </p:style>
+        <p:txBody>
+          <a:bodyPr rtlCol="0" anchor="ctr" wrap="square" lIns="0" rIns="0" tIns="0" bIns="0">
             <a:normAutofit/>
           </a:bodyPr>
           <a:lstStyle/>
           <a:p>
-            <a:pPr algn="ctr" indent="0" marL="0">
-              <a:buNone/>
-            </a:pPr>
-            <a:r>
-              <a:rPr lang="en-US" sz="1400" b="1" dirty="0">
+            <a:pPr algn="ctr"/>
+            <a:r>
+              <a:rPr sz="1400" b="1" i="0">
                 <a:solidFill>
                   <a:srgbClr val="595959"/>
                 </a:solidFill>
-                <a:latin typeface="Segoe UI" pitchFamily="34" charset="0"/>
-                <a:ea typeface="Segoe UI" pitchFamily="34" charset="-122"/>
-                <a:cs typeface="Segoe UI" pitchFamily="34" charset="-120"/>
+                <a:latin typeface="Segoe UI"/>
               </a:rPr>
               <a:t>KPI 1 label</a:t>
             </a:r>
-            <a:endParaRPr lang="en-US" sz="1400" dirty="0"/>
           </a:p>
         </p:txBody>
       </p:sp>
@@ -1317,35 +3627,47 @@
             <a:avLst/>
           </a:prstGeom>
           <a:noFill/>
-          <a:ln/>
+          <a:ln>
+            <a:noFill/>
+          </a:ln>
+          <a:effectLst/>
         </p:spPr>
-        <p:txBody>
-          <a:bodyPr wrap="square" rtlCol="0" anchor="ctr">
+        <p:style>
+          <a:lnRef idx="1">
+            <a:schemeClr val="accent1"/>
+          </a:lnRef>
+          <a:fillRef idx="3">
+            <a:schemeClr val="accent1"/>
+          </a:fillRef>
+          <a:effectRef idx="2">
+            <a:schemeClr val="accent1"/>
+          </a:effectRef>
+          <a:fontRef idx="minor">
+            <a:schemeClr val="lt1"/>
+          </a:fontRef>
+        </p:style>
+        <p:txBody>
+          <a:bodyPr rtlCol="0" anchor="ctr" wrap="square" lIns="0" rIns="0" tIns="0" bIns="0">
             <a:normAutofit/>
           </a:bodyPr>
           <a:lstStyle/>
           <a:p>
-            <a:pPr algn="ctr" indent="0" marL="0">
-              <a:buNone/>
-            </a:pPr>
-            <a:r>
-              <a:rPr lang="en-US" sz="2800" b="1" dirty="0">
+            <a:pPr algn="ctr"/>
+            <a:r>
+              <a:rPr sz="2800" b="1" i="0">
                 <a:solidFill>
                   <a:srgbClr val="1F3864"/>
                 </a:solidFill>
-                <a:latin typeface="Segoe UI" pitchFamily="34" charset="0"/>
-                <a:ea typeface="Segoe UI" pitchFamily="34" charset="-122"/>
-                <a:cs typeface="Segoe UI" pitchFamily="34" charset="-120"/>
+                <a:latin typeface="Segoe UI"/>
               </a:rPr>
               <a:t>—</a:t>
             </a:r>
-            <a:endParaRPr lang="en-US" sz="2800" dirty="0"/>
-          </a:p>
-        </p:txBody>
-      </p:sp>
-      <p:sp>
-        <p:nvSpPr>
-          <p:cNvPr id="8" name="Shape 6"/>
+          </a:p>
+        </p:txBody>
+      </p:sp>
+      <p:sp>
+        <p:nvSpPr>
+          <p:cNvPr id="8" name="Rounded Rectangle 7"/>
           <p:cNvSpPr/>
           <p:nvPr/>
         </p:nvSpPr>
@@ -1356,7 +3678,7 @@
           </a:xfrm>
           <a:prstGeom prst="roundRect">
             <a:avLst>
-              <a:gd name="adj" fmla="val 3077"/>
+              <a:gd name="adj" fmla="val 3076"/>
             </a:avLst>
           </a:prstGeom>
           <a:solidFill>
@@ -1366,9 +3688,30 @@
             <a:solidFill>
               <a:srgbClr val="2E5395"/>
             </a:solidFill>
-            <a:prstDash val="solid"/>
           </a:ln>
+          <a:effectLst/>
         </p:spPr>
+        <p:style>
+          <a:lnRef idx="1">
+            <a:schemeClr val="accent1"/>
+          </a:lnRef>
+          <a:fillRef idx="3">
+            <a:schemeClr val="accent1"/>
+          </a:fillRef>
+          <a:effectRef idx="2">
+            <a:schemeClr val="accent1"/>
+          </a:effectRef>
+          <a:fontRef idx="minor">
+            <a:schemeClr val="lt1"/>
+          </a:fontRef>
+        </p:style>
+        <p:txBody>
+          <a:bodyPr rtlCol="0" anchor="ctr"/>
+          <a:lstStyle/>
+          <a:p>
+            <a:pPr algn="ctr"/>
+          </a:p>
+        </p:txBody>
       </p:sp>
       <p:sp>
         <p:nvSpPr>
@@ -1385,29 +3728,41 @@
             <a:avLst/>
           </a:prstGeom>
           <a:noFill/>
-          <a:ln/>
+          <a:ln>
+            <a:noFill/>
+          </a:ln>
+          <a:effectLst/>
         </p:spPr>
-        <p:txBody>
-          <a:bodyPr wrap="square" rtlCol="0" anchor="ctr">
+        <p:style>
+          <a:lnRef idx="1">
+            <a:schemeClr val="accent1"/>
+          </a:lnRef>
+          <a:fillRef idx="3">
+            <a:schemeClr val="accent1"/>
+          </a:fillRef>
+          <a:effectRef idx="2">
+            <a:schemeClr val="accent1"/>
+          </a:effectRef>
+          <a:fontRef idx="minor">
+            <a:schemeClr val="lt1"/>
+          </a:fontRef>
+        </p:style>
+        <p:txBody>
+          <a:bodyPr rtlCol="0" anchor="ctr" wrap="square" lIns="0" rIns="0" tIns="0" bIns="0">
             <a:normAutofit/>
           </a:bodyPr>
           <a:lstStyle/>
           <a:p>
-            <a:pPr algn="ctr" indent="0" marL="0">
-              <a:buNone/>
-            </a:pPr>
-            <a:r>
-              <a:rPr lang="en-US" sz="1400" b="1" dirty="0">
+            <a:pPr algn="ctr"/>
+            <a:r>
+              <a:rPr sz="1400" b="1" i="0">
                 <a:solidFill>
                   <a:srgbClr val="595959"/>
                 </a:solidFill>
-                <a:latin typeface="Segoe UI" pitchFamily="34" charset="0"/>
-                <a:ea typeface="Segoe UI" pitchFamily="34" charset="-122"/>
-                <a:cs typeface="Segoe UI" pitchFamily="34" charset="-120"/>
+                <a:latin typeface="Segoe UI"/>
               </a:rPr>
               <a:t>KPI 2 label</a:t>
             </a:r>
-            <a:endParaRPr lang="en-US" sz="1400" dirty="0"/>
           </a:p>
         </p:txBody>
       </p:sp>
@@ -1426,35 +3781,47 @@
             <a:avLst/>
           </a:prstGeom>
           <a:noFill/>
-          <a:ln/>
+          <a:ln>
+            <a:noFill/>
+          </a:ln>
+          <a:effectLst/>
         </p:spPr>
-        <p:txBody>
-          <a:bodyPr wrap="square" rtlCol="0" anchor="ctr">
+        <p:style>
+          <a:lnRef idx="1">
+            <a:schemeClr val="accent1"/>
+          </a:lnRef>
+          <a:fillRef idx="3">
+            <a:schemeClr val="accent1"/>
+          </a:fillRef>
+          <a:effectRef idx="2">
+            <a:schemeClr val="accent1"/>
+          </a:effectRef>
+          <a:fontRef idx="minor">
+            <a:schemeClr val="lt1"/>
+          </a:fontRef>
+        </p:style>
+        <p:txBody>
+          <a:bodyPr rtlCol="0" anchor="ctr" wrap="square" lIns="0" rIns="0" tIns="0" bIns="0">
             <a:normAutofit/>
           </a:bodyPr>
           <a:lstStyle/>
           <a:p>
-            <a:pPr algn="ctr" indent="0" marL="0">
-              <a:buNone/>
-            </a:pPr>
-            <a:r>
-              <a:rPr lang="en-US" sz="2800" b="1" dirty="0">
+            <a:pPr algn="ctr"/>
+            <a:r>
+              <a:rPr sz="2800" b="1" i="0">
                 <a:solidFill>
                   <a:srgbClr val="1F3864"/>
                 </a:solidFill>
-                <a:latin typeface="Segoe UI" pitchFamily="34" charset="0"/>
-                <a:ea typeface="Segoe UI" pitchFamily="34" charset="-122"/>
-                <a:cs typeface="Segoe UI" pitchFamily="34" charset="-120"/>
+                <a:latin typeface="Segoe UI"/>
               </a:rPr>
               <a:t>—</a:t>
             </a:r>
-            <a:endParaRPr lang="en-US" sz="2800" dirty="0"/>
-          </a:p>
-        </p:txBody>
-      </p:sp>
-      <p:sp>
-        <p:nvSpPr>
-          <p:cNvPr id="11" name="Shape 9"/>
+          </a:p>
+        </p:txBody>
+      </p:sp>
+      <p:sp>
+        <p:nvSpPr>
+          <p:cNvPr id="11" name="Rounded Rectangle 10"/>
           <p:cNvSpPr/>
           <p:nvPr/>
         </p:nvSpPr>
@@ -1465,7 +3832,7 @@
           </a:xfrm>
           <a:prstGeom prst="roundRect">
             <a:avLst>
-              <a:gd name="adj" fmla="val 3077"/>
+              <a:gd name="adj" fmla="val 3076"/>
             </a:avLst>
           </a:prstGeom>
           <a:solidFill>
@@ -1475,9 +3842,30 @@
             <a:solidFill>
               <a:srgbClr val="2E5395"/>
             </a:solidFill>
-            <a:prstDash val="solid"/>
           </a:ln>
+          <a:effectLst/>
         </p:spPr>
+        <p:style>
+          <a:lnRef idx="1">
+            <a:schemeClr val="accent1"/>
+          </a:lnRef>
+          <a:fillRef idx="3">
+            <a:schemeClr val="accent1"/>
+          </a:fillRef>
+          <a:effectRef idx="2">
+            <a:schemeClr val="accent1"/>
+          </a:effectRef>
+          <a:fontRef idx="minor">
+            <a:schemeClr val="lt1"/>
+          </a:fontRef>
+        </p:style>
+        <p:txBody>
+          <a:bodyPr rtlCol="0" anchor="ctr"/>
+          <a:lstStyle/>
+          <a:p>
+            <a:pPr algn="ctr"/>
+          </a:p>
+        </p:txBody>
       </p:sp>
       <p:sp>
         <p:nvSpPr>
@@ -1494,29 +3882,41 @@
             <a:avLst/>
           </a:prstGeom>
           <a:noFill/>
-          <a:ln/>
+          <a:ln>
+            <a:noFill/>
+          </a:ln>
+          <a:effectLst/>
         </p:spPr>
-        <p:txBody>
-          <a:bodyPr wrap="square" rtlCol="0" anchor="ctr">
+        <p:style>
+          <a:lnRef idx="1">
+            <a:schemeClr val="accent1"/>
+          </a:lnRef>
+          <a:fillRef idx="3">
+            <a:schemeClr val="accent1"/>
+          </a:fillRef>
+          <a:effectRef idx="2">
+            <a:schemeClr val="accent1"/>
+          </a:effectRef>
+          <a:fontRef idx="minor">
+            <a:schemeClr val="lt1"/>
+          </a:fontRef>
+        </p:style>
+        <p:txBody>
+          <a:bodyPr rtlCol="0" anchor="ctr" wrap="square" lIns="0" rIns="0" tIns="0" bIns="0">
             <a:normAutofit/>
           </a:bodyPr>
           <a:lstStyle/>
           <a:p>
-            <a:pPr algn="ctr" indent="0" marL="0">
-              <a:buNone/>
-            </a:pPr>
-            <a:r>
-              <a:rPr lang="en-US" sz="1400" b="1" dirty="0">
+            <a:pPr algn="ctr"/>
+            <a:r>
+              <a:rPr sz="1400" b="1" i="0">
                 <a:solidFill>
                   <a:srgbClr val="595959"/>
                 </a:solidFill>
-                <a:latin typeface="Segoe UI" pitchFamily="34" charset="0"/>
-                <a:ea typeface="Segoe UI" pitchFamily="34" charset="-122"/>
-                <a:cs typeface="Segoe UI" pitchFamily="34" charset="-120"/>
+                <a:latin typeface="Segoe UI"/>
               </a:rPr>
               <a:t>KPI 3 label</a:t>
             </a:r>
-            <a:endParaRPr lang="en-US" sz="1400" dirty="0"/>
           </a:p>
         </p:txBody>
       </p:sp>
@@ -1535,35 +3935,47 @@
             <a:avLst/>
           </a:prstGeom>
           <a:noFill/>
-          <a:ln/>
+          <a:ln>
+            <a:noFill/>
+          </a:ln>
+          <a:effectLst/>
         </p:spPr>
-        <p:txBody>
-          <a:bodyPr wrap="square" rtlCol="0" anchor="ctr">
+        <p:style>
+          <a:lnRef idx="1">
+            <a:schemeClr val="accent1"/>
+          </a:lnRef>
+          <a:fillRef idx="3">
+            <a:schemeClr val="accent1"/>
+          </a:fillRef>
+          <a:effectRef idx="2">
+            <a:schemeClr val="accent1"/>
+          </a:effectRef>
+          <a:fontRef idx="minor">
+            <a:schemeClr val="lt1"/>
+          </a:fontRef>
+        </p:style>
+        <p:txBody>
+          <a:bodyPr rtlCol="0" anchor="ctr" wrap="square" lIns="0" rIns="0" tIns="0" bIns="0">
             <a:normAutofit/>
           </a:bodyPr>
           <a:lstStyle/>
           <a:p>
-            <a:pPr algn="ctr" indent="0" marL="0">
-              <a:buNone/>
-            </a:pPr>
-            <a:r>
-              <a:rPr lang="en-US" sz="2800" b="1" dirty="0">
+            <a:pPr algn="ctr"/>
+            <a:r>
+              <a:rPr sz="2800" b="1" i="0">
                 <a:solidFill>
                   <a:srgbClr val="1F3864"/>
                 </a:solidFill>
-                <a:latin typeface="Segoe UI" pitchFamily="34" charset="0"/>
-                <a:ea typeface="Segoe UI" pitchFamily="34" charset="-122"/>
-                <a:cs typeface="Segoe UI" pitchFamily="34" charset="-120"/>
+                <a:latin typeface="Segoe UI"/>
               </a:rPr>
               <a:t>—</a:t>
             </a:r>
-            <a:endParaRPr lang="en-US" sz="2800" dirty="0"/>
-          </a:p>
-        </p:txBody>
-      </p:sp>
-      <p:sp>
-        <p:nvSpPr>
-          <p:cNvPr id="14" name="Shape 12"/>
+          </a:p>
+        </p:txBody>
+      </p:sp>
+      <p:sp>
+        <p:nvSpPr>
+          <p:cNvPr id="14" name="Rounded Rectangle 13"/>
           <p:cNvSpPr/>
           <p:nvPr/>
         </p:nvSpPr>
@@ -1574,7 +3986,7 @@
           </a:xfrm>
           <a:prstGeom prst="roundRect">
             <a:avLst>
-              <a:gd name="adj" fmla="val 3077"/>
+              <a:gd name="adj" fmla="val 3076"/>
             </a:avLst>
           </a:prstGeom>
           <a:solidFill>
@@ -1584,9 +3996,30 @@
             <a:solidFill>
               <a:srgbClr val="2E5395"/>
             </a:solidFill>
-            <a:prstDash val="solid"/>
           </a:ln>
+          <a:effectLst/>
         </p:spPr>
+        <p:style>
+          <a:lnRef idx="1">
+            <a:schemeClr val="accent1"/>
+          </a:lnRef>
+          <a:fillRef idx="3">
+            <a:schemeClr val="accent1"/>
+          </a:fillRef>
+          <a:effectRef idx="2">
+            <a:schemeClr val="accent1"/>
+          </a:effectRef>
+          <a:fontRef idx="minor">
+            <a:schemeClr val="lt1"/>
+          </a:fontRef>
+        </p:style>
+        <p:txBody>
+          <a:bodyPr rtlCol="0" anchor="ctr"/>
+          <a:lstStyle/>
+          <a:p>
+            <a:pPr algn="ctr"/>
+          </a:p>
+        </p:txBody>
       </p:sp>
       <p:sp>
         <p:nvSpPr>
@@ -1603,29 +4036,41 @@
             <a:avLst/>
           </a:prstGeom>
           <a:noFill/>
-          <a:ln/>
+          <a:ln>
+            <a:noFill/>
+          </a:ln>
+          <a:effectLst/>
         </p:spPr>
-        <p:txBody>
-          <a:bodyPr wrap="square" rtlCol="0" anchor="ctr">
+        <p:style>
+          <a:lnRef idx="1">
+            <a:schemeClr val="accent1"/>
+          </a:lnRef>
+          <a:fillRef idx="3">
+            <a:schemeClr val="accent1"/>
+          </a:fillRef>
+          <a:effectRef idx="2">
+            <a:schemeClr val="accent1"/>
+          </a:effectRef>
+          <a:fontRef idx="minor">
+            <a:schemeClr val="lt1"/>
+          </a:fontRef>
+        </p:style>
+        <p:txBody>
+          <a:bodyPr rtlCol="0" anchor="ctr" wrap="square" lIns="0" rIns="0" tIns="0" bIns="0">
             <a:normAutofit/>
           </a:bodyPr>
           <a:lstStyle/>
           <a:p>
-            <a:pPr algn="ctr" indent="0" marL="0">
-              <a:buNone/>
-            </a:pPr>
-            <a:r>
-              <a:rPr lang="en-US" sz="1400" b="1" dirty="0">
+            <a:pPr algn="ctr"/>
+            <a:r>
+              <a:rPr sz="1400" b="1" i="0">
                 <a:solidFill>
                   <a:srgbClr val="595959"/>
                 </a:solidFill>
-                <a:latin typeface="Segoe UI" pitchFamily="34" charset="0"/>
-                <a:ea typeface="Segoe UI" pitchFamily="34" charset="-122"/>
-                <a:cs typeface="Segoe UI" pitchFamily="34" charset="-120"/>
+                <a:latin typeface="Segoe UI"/>
               </a:rPr>
               <a:t>KPI 4 label</a:t>
             </a:r>
-            <a:endParaRPr lang="en-US" sz="1400" dirty="0"/>
           </a:p>
         </p:txBody>
       </p:sp>
@@ -1644,29 +4089,41 @@
             <a:avLst/>
           </a:prstGeom>
           <a:noFill/>
-          <a:ln/>
+          <a:ln>
+            <a:noFill/>
+          </a:ln>
+          <a:effectLst/>
         </p:spPr>
-        <p:txBody>
-          <a:bodyPr wrap="square" rtlCol="0" anchor="ctr">
+        <p:style>
+          <a:lnRef idx="1">
+            <a:schemeClr val="accent1"/>
+          </a:lnRef>
+          <a:fillRef idx="3">
+            <a:schemeClr val="accent1"/>
+          </a:fillRef>
+          <a:effectRef idx="2">
+            <a:schemeClr val="accent1"/>
+          </a:effectRef>
+          <a:fontRef idx="minor">
+            <a:schemeClr val="lt1"/>
+          </a:fontRef>
+        </p:style>
+        <p:txBody>
+          <a:bodyPr rtlCol="0" anchor="ctr" wrap="square" lIns="0" rIns="0" tIns="0" bIns="0">
             <a:normAutofit/>
           </a:bodyPr>
           <a:lstStyle/>
           <a:p>
-            <a:pPr algn="ctr" indent="0" marL="0">
-              <a:buNone/>
-            </a:pPr>
-            <a:r>
-              <a:rPr lang="en-US" sz="2800" b="1" dirty="0">
+            <a:pPr algn="ctr"/>
+            <a:r>
+              <a:rPr sz="2800" b="1" i="0">
                 <a:solidFill>
                   <a:srgbClr val="1F3864"/>
                 </a:solidFill>
-                <a:latin typeface="Segoe UI" pitchFamily="34" charset="0"/>
-                <a:ea typeface="Segoe UI" pitchFamily="34" charset="-122"/>
-                <a:cs typeface="Segoe UI" pitchFamily="34" charset="-120"/>
+                <a:latin typeface="Segoe UI"/>
               </a:rPr>
               <a:t>—</a:t>
             </a:r>
-            <a:endParaRPr lang="en-US" sz="2800" dirty="0"/>
           </a:p>
         </p:txBody>
       </p:sp>
@@ -1685,27 +4142,41 @@
             <a:avLst/>
           </a:prstGeom>
           <a:noFill/>
-          <a:ln/>
+          <a:ln>
+            <a:noFill/>
+          </a:ln>
+          <a:effectLst/>
         </p:spPr>
-        <p:txBody>
-          <a:bodyPr wrap="square" rtlCol="0" anchor="ctr"/>
-          <a:lstStyle/>
-          <a:p>
-            <a:pPr algn="l" indent="0" marL="0">
-              <a:buNone/>
-            </a:pPr>
-            <a:r>
-              <a:rPr lang="en-US" sz="1000" i="1" dirty="0">
+        <p:style>
+          <a:lnRef idx="1">
+            <a:schemeClr val="accent1"/>
+          </a:lnRef>
+          <a:fillRef idx="3">
+            <a:schemeClr val="accent1"/>
+          </a:fillRef>
+          <a:effectRef idx="2">
+            <a:schemeClr val="accent1"/>
+          </a:effectRef>
+          <a:fontRef idx="minor">
+            <a:schemeClr val="lt1"/>
+          </a:fontRef>
+        </p:style>
+        <p:txBody>
+          <a:bodyPr rtlCol="0" anchor="ctr" wrap="square" lIns="0" rIns="0" tIns="0" bIns="0">
+            <a:noAutofit/>
+          </a:bodyPr>
+          <a:lstStyle/>
+          <a:p>
+            <a:pPr algn="l"/>
+            <a:r>
+              <a:rPr sz="1000" b="0" i="1">
                 <a:solidFill>
                   <a:srgbClr val="595959"/>
                 </a:solidFill>
-                <a:latin typeface="Segoe UI" pitchFamily="34" charset="0"/>
-                <a:ea typeface="Segoe UI" pitchFamily="34" charset="-122"/>
-                <a:cs typeface="Segoe UI" pitchFamily="34" charset="-120"/>
+                <a:latin typeface="Segoe UI"/>
               </a:rPr>
               <a:t>Source: workbook reference</a:t>
             </a:r>
-            <a:endParaRPr lang="en-US" sz="1000" dirty="0"/>
           </a:p>
         </p:txBody>
       </p:sp>
@@ -1728,44 +4199,44 @@
         <a:sysClr val="window" lastClr="FFFFFF"/>
       </a:lt1>
       <a:dk2>
-        <a:srgbClr val="44546A"/>
+        <a:srgbClr val="1F497D"/>
       </a:dk2>
       <a:lt2>
-        <a:srgbClr val="E7E6E6"/>
+        <a:srgbClr val="EEECE1"/>
       </a:lt2>
       <a:accent1>
-        <a:srgbClr val="4472C4"/>
+        <a:srgbClr val="4F81BD"/>
       </a:accent1>
       <a:accent2>
-        <a:srgbClr val="ED7D31"/>
+        <a:srgbClr val="C0504D"/>
       </a:accent2>
       <a:accent3>
-        <a:srgbClr val="A5A5A5"/>
+        <a:srgbClr val="9BBB59"/>
       </a:accent3>
       <a:accent4>
-        <a:srgbClr val="FFC000"/>
+        <a:srgbClr val="8064A2"/>
       </a:accent4>
       <a:accent5>
-        <a:srgbClr val="5B9BD5"/>
+        <a:srgbClr val="4BACC6"/>
       </a:accent5>
       <a:accent6>
-        <a:srgbClr val="70AD47"/>
+        <a:srgbClr val="F79646"/>
       </a:accent6>
       <a:hlink>
-        <a:srgbClr val="0563C1"/>
+        <a:srgbClr val="0000FF"/>
       </a:hlink>
       <a:folHlink>
-        <a:srgbClr val="954F72"/>
+        <a:srgbClr val="800080"/>
       </a:folHlink>
     </a:clrScheme>
     <a:fontScheme name="Office">
       <a:majorFont>
-        <a:latin typeface="Calibri Light" panose="020F0302020204030204"/>
+        <a:latin typeface="Calibri"/>
         <a:ea typeface=""/>
         <a:cs typeface=""/>
-        <a:font script="Jpan" typeface="游ゴシック Light"/>
+        <a:font script="Jpan" typeface="ＭＳ Ｐゴシック"/>
         <a:font script="Hang" typeface="맑은 고딕"/>
-        <a:font script="Hans" typeface="等线 Light"/>
+        <a:font script="Hans" typeface="宋体"/>
         <a:font script="Hant" typeface="新細明體"/>
         <a:font script="Arab" typeface="Times New Roman"/>
         <a:font script="Hebr" typeface="Times New Roman"/>
@@ -1793,31 +4264,14 @@
         <a:font script="Viet" typeface="Times New Roman"/>
         <a:font script="Uigh" typeface="Microsoft Uighur"/>
         <a:font script="Geor" typeface="Sylfaen"/>
-        <a:font script="Armn" typeface="Arial"/>
-        <a:font script="Bugi" typeface="Leelawadee UI"/>
-        <a:font script="Bopo" typeface="Microsoft JhengHei"/>
-        <a:font script="Java" typeface="Javanese Text"/>
-        <a:font script="Lisu" typeface="Segoe UI"/>
-        <a:font script="Mymr" typeface="Myanmar Text"/>
-        <a:font script="Nkoo" typeface="Ebrima"/>
-        <a:font script="Olck" typeface="Nirmala UI"/>
-        <a:font script="Osma" typeface="Ebrima"/>
-        <a:font script="Phag" typeface="Phagspa"/>
-        <a:font script="Syrn" typeface="Estrangelo Edessa"/>
-        <a:font script="Syrj" typeface="Estrangelo Edessa"/>
-        <a:font script="Syre" typeface="Estrangelo Edessa"/>
-        <a:font script="Sora" typeface="Nirmala UI"/>
-        <a:font script="Tale" typeface="Microsoft Tai Le"/>
-        <a:font script="Talu" typeface="Microsoft New Tai Lue"/>
-        <a:font script="Tfng" typeface="Ebrima"/>
       </a:majorFont>
       <a:minorFont>
-        <a:latin typeface="Calibri" panose="020F0502020204030204"/>
+        <a:latin typeface="Calibri"/>
         <a:ea typeface=""/>
         <a:cs typeface=""/>
-        <a:font script="Jpan" typeface="游ゴシック"/>
+        <a:font script="Jpan" typeface="ＭＳ Ｐゴシック"/>
         <a:font script="Hang" typeface="맑은 고딕"/>
-        <a:font script="Hans" typeface="等线"/>
+        <a:font script="Hans" typeface="宋体"/>
         <a:font script="Hant" typeface="新細明體"/>
         <a:font script="Arab" typeface="Arial"/>
         <a:font script="Hebr" typeface="Arial"/>
@@ -1845,23 +4299,6 @@
         <a:font script="Viet" typeface="Arial"/>
         <a:font script="Uigh" typeface="Microsoft Uighur"/>
         <a:font script="Geor" typeface="Sylfaen"/>
-        <a:font script="Armn" typeface="Arial"/>
-        <a:font script="Bugi" typeface="Leelawadee UI"/>
-        <a:font script="Bopo" typeface="Microsoft JhengHei"/>
-        <a:font script="Java" typeface="Javanese Text"/>
-        <a:font script="Lisu" typeface="Segoe UI"/>
-        <a:font script="Mymr" typeface="Myanmar Text"/>
-        <a:font script="Nkoo" typeface="Ebrima"/>
-        <a:font script="Olck" typeface="Nirmala UI"/>
-        <a:font script="Osma" typeface="Ebrima"/>
-        <a:font script="Phag" typeface="Phagspa"/>
-        <a:font script="Syrn" typeface="Estrangelo Edessa"/>
-        <a:font script="Syrj" typeface="Estrangelo Edessa"/>
-        <a:font script="Syre" typeface="Estrangelo Edessa"/>
-        <a:font script="Sora" typeface="Nirmala UI"/>
-        <a:font script="Tale" typeface="Microsoft Tai Le"/>
-        <a:font script="Talu" typeface="Microsoft New Tai Lue"/>
-        <a:font script="Tfng" typeface="Ebrima"/>
       </a:minorFont>
     </a:fontScheme>
     <a:fmtScheme name="Office">
@@ -1873,141 +4310,200 @@
           <a:gsLst>
             <a:gs pos="0">
               <a:schemeClr val="phClr">
-                <a:lumMod val="110000"/>
-                <a:satMod val="105000"/>
-                <a:tint val="67000"/>
+                <a:tint val="50000"/>
+                <a:satMod val="300000"/>
               </a:schemeClr>
             </a:gs>
-            <a:gs pos="50000">
+            <a:gs pos="35000">
               <a:schemeClr val="phClr">
-                <a:lumMod val="105000"/>
-                <a:satMod val="103000"/>
-                <a:tint val="73000"/>
+                <a:tint val="37000"/>
+                <a:satMod val="300000"/>
               </a:schemeClr>
             </a:gs>
             <a:gs pos="100000">
               <a:schemeClr val="phClr">
-                <a:lumMod val="105000"/>
-                <a:satMod val="109000"/>
-                <a:tint val="81000"/>
+                <a:tint val="15000"/>
+                <a:satMod val="350000"/>
               </a:schemeClr>
             </a:gs>
           </a:gsLst>
-          <a:lin ang="5400000" scaled="0"/>
+          <a:lin ang="16200000" scaled="1"/>
         </a:gradFill>
         <a:gradFill rotWithShape="1">
           <a:gsLst>
             <a:gs pos="0">
               <a:schemeClr val="phClr">
-                <a:satMod val="103000"/>
-                <a:lumMod val="102000"/>
-                <a:tint val="94000"/>
-              </a:schemeClr>
-            </a:gs>
-            <a:gs pos="50000">
-              <a:schemeClr val="phClr">
-                <a:satMod val="110000"/>
-                <a:lumMod val="100000"/>
+                <a:tint val="100000"/>
                 <a:shade val="100000"/>
+                <a:satMod val="130000"/>
               </a:schemeClr>
             </a:gs>
             <a:gs pos="100000">
               <a:schemeClr val="phClr">
-                <a:lumMod val="99000"/>
-                <a:satMod val="120000"/>
-                <a:shade val="78000"/>
+                <a:tint val="50000"/>
+                <a:shade val="100000"/>
+                <a:satMod val="350000"/>
               </a:schemeClr>
             </a:gs>
           </a:gsLst>
-          <a:lin ang="5400000" scaled="0"/>
+          <a:lin ang="16200000" scaled="0"/>
         </a:gradFill>
       </a:fillStyleLst>
       <a:lnStyleLst>
-        <a:ln w="6350" cap="flat" cmpd="sng" algn="ctr">
+        <a:ln w="9525" cap="flat" cmpd="sng" algn="ctr">
+          <a:solidFill>
+            <a:schemeClr val="phClr">
+              <a:shade val="95000"/>
+              <a:satMod val="105000"/>
+            </a:schemeClr>
+          </a:solidFill>
+          <a:prstDash val="solid"/>
+        </a:ln>
+        <a:ln w="25400" cap="flat" cmpd="sng" algn="ctr">
           <a:solidFill>
             <a:schemeClr val="phClr"/>
           </a:solidFill>
           <a:prstDash val="solid"/>
-          <a:miter lim="800000"/>
         </a:ln>
-        <a:ln w="12700" cap="flat" cmpd="sng" algn="ctr">
+        <a:ln w="38100" cap="flat" cmpd="sng" algn="ctr">
           <a:solidFill>
             <a:schemeClr val="phClr"/>
           </a:solidFill>
           <a:prstDash val="solid"/>
-          <a:miter lim="800000"/>
-        </a:ln>
-        <a:ln w="19050" cap="flat" cmpd="sng" algn="ctr">
-          <a:solidFill>
-            <a:schemeClr val="phClr"/>
-          </a:solidFill>
-          <a:prstDash val="solid"/>
-          <a:miter lim="800000"/>
         </a:ln>
       </a:lnStyleLst>
       <a:effectStyleLst>
         <a:effectStyle>
-          <a:effectLst/>
-        </a:effectStyle>
-        <a:effectStyle>
-          <a:effectLst/>
+          <a:effectLst>
+            <a:outerShdw blurRad="40000" dist="20000" dir="5400000" rotWithShape="0">
+              <a:srgbClr val="000000">
+                <a:alpha val="38000"/>
+              </a:srgbClr>
+            </a:outerShdw>
+          </a:effectLst>
         </a:effectStyle>
         <a:effectStyle>
           <a:effectLst>
-            <a:outerShdw blurRad="57150" dist="19050" dir="5400000" algn="ctr" rotWithShape="0">
+            <a:outerShdw blurRad="40000" dist="23000" dir="5400000" rotWithShape="0">
               <a:srgbClr val="000000">
-                <a:alpha val="63000"/>
+                <a:alpha val="35000"/>
               </a:srgbClr>
             </a:outerShdw>
           </a:effectLst>
+        </a:effectStyle>
+        <a:effectStyle>
+          <a:effectLst>
+            <a:outerShdw blurRad="40000" dist="23000" dir="5400000" rotWithShape="0">
+              <a:srgbClr val="000000">
+                <a:alpha val="35000"/>
+              </a:srgbClr>
+            </a:outerShdw>
+          </a:effectLst>
+          <a:scene3d>
+            <a:camera prst="orthographicFront">
+              <a:rot lat="0" lon="0" rev="0"/>
+            </a:camera>
+            <a:lightRig rig="threePt" dir="t">
+              <a:rot lat="0" lon="0" rev="1200000"/>
+            </a:lightRig>
+          </a:scene3d>
+          <a:sp3d>
+            <a:bevelT w="63500" h="25400"/>
+          </a:sp3d>
         </a:effectStyle>
       </a:effectStyleLst>
       <a:bgFillStyleLst>
         <a:solidFill>
           <a:schemeClr val="phClr"/>
         </a:solidFill>
-        <a:solidFill>
-          <a:schemeClr val="phClr">
-            <a:tint val="95000"/>
-            <a:satMod val="170000"/>
-          </a:schemeClr>
-        </a:solidFill>
         <a:gradFill rotWithShape="1">
           <a:gsLst>
             <a:gs pos="0">
               <a:schemeClr val="phClr">
-                <a:tint val="93000"/>
-                <a:satMod val="150000"/>
-                <a:shade val="98000"/>
-                <a:lumMod val="102000"/>
+                <a:tint val="40000"/>
+                <a:satMod val="350000"/>
               </a:schemeClr>
             </a:gs>
-            <a:gs pos="50000">
+            <a:gs pos="40000">
               <a:schemeClr val="phClr">
-                <a:tint val="98000"/>
-                <a:satMod val="130000"/>
-                <a:shade val="90000"/>
-                <a:lumMod val="103000"/>
+                <a:tint val="45000"/>
+                <a:shade val="99000"/>
+                <a:satMod val="350000"/>
               </a:schemeClr>
             </a:gs>
             <a:gs pos="100000">
               <a:schemeClr val="phClr">
-                <a:shade val="63000"/>
-                <a:satMod val="120000"/>
+                <a:shade val="20000"/>
+                <a:satMod val="255000"/>
               </a:schemeClr>
             </a:gs>
           </a:gsLst>
-          <a:lin ang="5400000" scaled="0"/>
+          <a:path path="circle">
+            <a:fillToRect l="50000" t="-80000" r="50000" b="180000"/>
+          </a:path>
+        </a:gradFill>
+        <a:gradFill rotWithShape="1">
+          <a:gsLst>
+            <a:gs pos="0">
+              <a:schemeClr val="phClr">
+                <a:tint val="80000"/>
+                <a:satMod val="300000"/>
+              </a:schemeClr>
+            </a:gs>
+            <a:gs pos="100000">
+              <a:schemeClr val="phClr">
+                <a:shade val="30000"/>
+                <a:satMod val="200000"/>
+              </a:schemeClr>
+            </a:gs>
+          </a:gsLst>
+          <a:path path="circle">
+            <a:fillToRect l="50000" t="50000" r="50000" b="50000"/>
+          </a:path>
         </a:gradFill>
       </a:bgFillStyleLst>
     </a:fmtScheme>
   </a:themeElements>
-  <a:objectDefaults/>
+  <a:objectDefaults>
+    <a:spDef>
+      <a:spPr/>
+      <a:bodyPr/>
+      <a:lstStyle/>
+      <a:style>
+        <a:lnRef idx="1">
+          <a:schemeClr val="accent1"/>
+        </a:lnRef>
+        <a:fillRef idx="3">
+          <a:schemeClr val="accent1"/>
+        </a:fillRef>
+        <a:effectRef idx="2">
+          <a:schemeClr val="accent1"/>
+        </a:effectRef>
+        <a:fontRef idx="minor">
+          <a:schemeClr val="lt1"/>
+        </a:fontRef>
+      </a:style>
+    </a:spDef>
+    <a:lnDef>
+      <a:spPr/>
+      <a:bodyPr/>
+      <a:lstStyle/>
+      <a:style>
+        <a:lnRef idx="2">
+          <a:schemeClr val="accent1"/>
+        </a:lnRef>
+        <a:fillRef idx="0">
+          <a:schemeClr val="accent1"/>
+        </a:fillRef>
+        <a:effectRef idx="1">
+          <a:schemeClr val="accent1"/>
+        </a:effectRef>
+        <a:fontRef idx="minor">
+          <a:schemeClr val="tx1"/>
+        </a:fontRef>
+      </a:style>
+    </a:lnDef>
+  </a:objectDefaults>
   <a:extraClrSchemeLst/>
-  <a:extLst>
-    <a:ext uri="{05A4C25C-085E-4340-85A3-A5531E510DB2}">
-      <thm15:themeFamily xmlns:thm15="http://schemas.microsoft.com/office/thememl/2012/main" name="Office Theme" id="{62F939B6-93AF-4DB8-9C6B-D6C7DFDC589F}" vid="{4A3C46E8-61CC-4603-A589-7422A47A8E4A}"/>
-    </a:ext>
-  </a:extLst>
 </a:theme>
 </file>